--- a/Magistrale/PCD/esame/presentazione.pptx
+++ b/Magistrale/PCD/esame/presentazione.pptx
@@ -274,7 +274,7 @@
       </p:grpSpPr>
       <p:sp>
         <p:nvSpPr>
-          <p:cNvPr id="1632000523" name="Google Shape;3;n"/>
+          <p:cNvPr id="1719090037" name="Google Shape;3;n"/>
           <p:cNvSpPr/>
           <p:nvPr>
             <p:ph type="sldImg" idx="2"/>
@@ -323,7 +323,7 @@
       </p:sp>
       <p:sp>
         <p:nvSpPr>
-          <p:cNvPr id="389756515" name="Google Shape;4;n"/>
+          <p:cNvPr id="42992283" name="Google Shape;4;n"/>
           <p:cNvSpPr txBox="1"/>
           <p:nvPr>
             <p:ph type="body" idx="1"/>
@@ -701,7 +701,7 @@
       </p:grpSpPr>
       <p:sp>
         <p:nvSpPr>
-          <p:cNvPr id="1168148927" name="Google Shape;81;p1:notes"/>
+          <p:cNvPr id="1127863214" name="Google Shape;81;p1:notes"/>
           <p:cNvSpPr txBox="1"/>
           <p:nvPr>
             <p:ph type="body" idx="1"/>
@@ -738,7 +738,7 @@
       </p:sp>
       <p:sp>
         <p:nvSpPr>
-          <p:cNvPr id="136852673" name="Google Shape;82;p1:notes"/>
+          <p:cNvPr id="27699495" name="Google Shape;82;p1:notes"/>
           <p:cNvSpPr/>
           <p:nvPr>
             <p:ph type="sldImg" idx="2"/>
@@ -802,7 +802,7 @@
       </p:grpSpPr>
       <p:sp>
         <p:nvSpPr>
-          <p:cNvPr id="1054712259" name="Google Shape;201;p6:notes"/>
+          <p:cNvPr id="2051248455" name="Google Shape;201;p6:notes"/>
           <p:cNvSpPr txBox="1"/>
           <p:nvPr>
             <p:ph type="body" idx="1"/>
@@ -839,7 +839,7 @@
       </p:sp>
       <p:sp>
         <p:nvSpPr>
-          <p:cNvPr id="327518926" name="Google Shape;202;p6:notes"/>
+          <p:cNvPr id="2140087607" name="Google Shape;202;p6:notes"/>
           <p:cNvSpPr/>
           <p:nvPr>
             <p:ph type="sldImg" idx="2"/>
@@ -903,7 +903,7 @@
       </p:grpSpPr>
       <p:sp>
         <p:nvSpPr>
-          <p:cNvPr id="1676571690" name="Google Shape;201;p6:notes"/>
+          <p:cNvPr id="417704268" name="Google Shape;201;p6:notes"/>
           <p:cNvSpPr txBox="1"/>
           <p:nvPr>
             <p:ph type="body" idx="1"/>
@@ -919,7 +919,7 @@
           </a:prstGeom>
         </p:spPr>
         <p:txBody>
-          <a:bodyPr spcFirstLastPara="1" wrap="square" lIns="91424" tIns="91424" rIns="91424" bIns="91424" anchor="t" anchorCtr="0">
+          <a:bodyPr spcFirstLastPara="1" wrap="square" lIns="91423" tIns="91423" rIns="91423" bIns="91423" anchor="t" anchorCtr="0">
             <a:noAutofit/>
           </a:bodyPr>
           <a:lstStyle/>
@@ -940,7 +940,7 @@
       </p:sp>
       <p:sp>
         <p:nvSpPr>
-          <p:cNvPr id="2097541110" name="Google Shape;202;p6:notes"/>
+          <p:cNvPr id="658083103" name="Google Shape;202;p6:notes"/>
           <p:cNvSpPr/>
           <p:nvPr>
             <p:ph type="sldImg" idx="2"/>
@@ -1004,7 +1004,7 @@
       </p:grpSpPr>
       <p:sp>
         <p:nvSpPr>
-          <p:cNvPr id="279568514" name="Google Shape;201;p6:notes"/>
+          <p:cNvPr id="560973291" name="Google Shape;201;p6:notes"/>
           <p:cNvSpPr txBox="1"/>
           <p:nvPr>
             <p:ph type="body" idx="1"/>
@@ -1020,7 +1020,7 @@
           </a:prstGeom>
         </p:spPr>
         <p:txBody>
-          <a:bodyPr spcFirstLastPara="1" wrap="square" lIns="91424" tIns="91424" rIns="91424" bIns="91424" anchor="t" anchorCtr="0">
+          <a:bodyPr spcFirstLastPara="1" wrap="square" lIns="91423" tIns="91423" rIns="91423" bIns="91423" anchor="t" anchorCtr="0">
             <a:noAutofit/>
           </a:bodyPr>
           <a:lstStyle/>
@@ -1041,7 +1041,7 @@
       </p:sp>
       <p:sp>
         <p:nvSpPr>
-          <p:cNvPr id="1350944300" name="Google Shape;202;p6:notes"/>
+          <p:cNvPr id="75737568" name="Google Shape;202;p6:notes"/>
           <p:cNvSpPr/>
           <p:nvPr>
             <p:ph type="sldImg" idx="2"/>
@@ -1105,7 +1105,7 @@
       </p:grpSpPr>
       <p:sp>
         <p:nvSpPr>
-          <p:cNvPr id="679885367" name="Google Shape;218;p7:notes"/>
+          <p:cNvPr id="1405994697" name="Google Shape;218;p7:notes"/>
           <p:cNvSpPr txBox="1"/>
           <p:nvPr>
             <p:ph type="body" idx="1"/>
@@ -1142,7 +1142,7 @@
       </p:sp>
       <p:sp>
         <p:nvSpPr>
-          <p:cNvPr id="160248985" name="Google Shape;219;p7:notes"/>
+          <p:cNvPr id="553189032" name="Google Shape;219;p7:notes"/>
           <p:cNvSpPr/>
           <p:nvPr>
             <p:ph type="sldImg" idx="2"/>
@@ -1206,7 +1206,7 @@
       </p:grpSpPr>
       <p:sp>
         <p:nvSpPr>
-          <p:cNvPr id="375424749" name="Google Shape;218;p7:notes"/>
+          <p:cNvPr id="1057890977" name="Google Shape;218;p7:notes"/>
           <p:cNvSpPr txBox="1"/>
           <p:nvPr>
             <p:ph type="body" idx="1"/>
@@ -1222,7 +1222,7 @@
           </a:prstGeom>
         </p:spPr>
         <p:txBody>
-          <a:bodyPr spcFirstLastPara="1" wrap="square" lIns="91424" tIns="91424" rIns="91424" bIns="91424" anchor="t" anchorCtr="0">
+          <a:bodyPr spcFirstLastPara="1" wrap="square" lIns="91423" tIns="91423" rIns="91423" bIns="91423" anchor="t" anchorCtr="0">
             <a:noAutofit/>
           </a:bodyPr>
           <a:lstStyle/>
@@ -1243,7 +1243,7 @@
       </p:sp>
       <p:sp>
         <p:nvSpPr>
-          <p:cNvPr id="756377399" name="Google Shape;219;p7:notes"/>
+          <p:cNvPr id="67034204" name="Google Shape;219;p7:notes"/>
           <p:cNvSpPr/>
           <p:nvPr>
             <p:ph type="sldImg" idx="2"/>
@@ -1307,7 +1307,7 @@
       </p:grpSpPr>
       <p:sp>
         <p:nvSpPr>
-          <p:cNvPr id="653650567" name="Google Shape;201;p6:notes"/>
+          <p:cNvPr id="120315808" name="Google Shape;201;p6:notes"/>
           <p:cNvSpPr txBox="1"/>
           <p:nvPr>
             <p:ph type="body" idx="1"/>
@@ -1323,7 +1323,7 @@
           </a:prstGeom>
         </p:spPr>
         <p:txBody>
-          <a:bodyPr spcFirstLastPara="1" wrap="square" lIns="91424" tIns="91424" rIns="91424" bIns="91424" anchor="t" anchorCtr="0">
+          <a:bodyPr spcFirstLastPara="1" wrap="square" lIns="91423" tIns="91423" rIns="91423" bIns="91423" anchor="t" anchorCtr="0">
             <a:noAutofit/>
           </a:bodyPr>
           <a:lstStyle/>
@@ -1344,7 +1344,7 @@
       </p:sp>
       <p:sp>
         <p:nvSpPr>
-          <p:cNvPr id="1447620423" name="Google Shape;202;p6:notes"/>
+          <p:cNvPr id="1532505105" name="Google Shape;202;p6:notes"/>
           <p:cNvSpPr/>
           <p:nvPr>
             <p:ph type="sldImg" idx="2"/>
@@ -1408,7 +1408,7 @@
       </p:grpSpPr>
       <p:sp>
         <p:nvSpPr>
-          <p:cNvPr id="1322185700" name="Google Shape;241;p8:notes"/>
+          <p:cNvPr id="222613401" name="Google Shape;241;p8:notes"/>
           <p:cNvSpPr txBox="1"/>
           <p:nvPr>
             <p:ph type="body" idx="1"/>
@@ -1445,7 +1445,7 @@
       </p:sp>
       <p:sp>
         <p:nvSpPr>
-          <p:cNvPr id="1813417409" name="Google Shape;242;p8:notes"/>
+          <p:cNvPr id="788282380" name="Google Shape;242;p8:notes"/>
           <p:cNvSpPr/>
           <p:nvPr>
             <p:ph type="sldImg" idx="2"/>
@@ -1509,7 +1509,7 @@
       </p:grpSpPr>
       <p:sp>
         <p:nvSpPr>
-          <p:cNvPr id="488210404" name="Google Shape;261;p9:notes"/>
+          <p:cNvPr id="1061908885" name="Google Shape;261;p9:notes"/>
           <p:cNvSpPr txBox="1"/>
           <p:nvPr>
             <p:ph type="body" idx="1"/>
@@ -1546,7 +1546,7 @@
       </p:sp>
       <p:sp>
         <p:nvSpPr>
-          <p:cNvPr id="1876340687" name="Google Shape;262;p9:notes"/>
+          <p:cNvPr id="3493585" name="Google Shape;262;p9:notes"/>
           <p:cNvSpPr/>
           <p:nvPr>
             <p:ph type="sldImg" idx="2"/>
@@ -1610,7 +1610,7 @@
       </p:grpSpPr>
       <p:sp>
         <p:nvSpPr>
-          <p:cNvPr id="1104900505" name="Google Shape;289;p10:notes"/>
+          <p:cNvPr id="1024608032" name="Google Shape;289;p10:notes"/>
           <p:cNvSpPr txBox="1"/>
           <p:nvPr>
             <p:ph type="body" idx="1"/>
@@ -1647,7 +1647,7 @@
       </p:sp>
       <p:sp>
         <p:nvSpPr>
-          <p:cNvPr id="882058613" name="Google Shape;290;p10:notes"/>
+          <p:cNvPr id="295823727" name="Google Shape;290;p10:notes"/>
           <p:cNvSpPr/>
           <p:nvPr>
             <p:ph type="sldImg" idx="2"/>
@@ -1711,7 +1711,7 @@
       </p:grpSpPr>
       <p:sp>
         <p:nvSpPr>
-          <p:cNvPr id="990107295" name="Google Shape;307;p11:notes"/>
+          <p:cNvPr id="827545405" name="Google Shape;307;p11:notes"/>
           <p:cNvSpPr txBox="1"/>
           <p:nvPr>
             <p:ph type="body" idx="1"/>
@@ -1748,7 +1748,7 @@
       </p:sp>
       <p:sp>
         <p:nvSpPr>
-          <p:cNvPr id="1907661082" name="Google Shape;308;p11:notes"/>
+          <p:cNvPr id="237988233" name="Google Shape;308;p11:notes"/>
           <p:cNvSpPr/>
           <p:nvPr>
             <p:ph type="sldImg" idx="2"/>
@@ -1812,7 +1812,7 @@
       </p:grpSpPr>
       <p:sp>
         <p:nvSpPr>
-          <p:cNvPr id="544333051" name="Google Shape;95;p2:notes"/>
+          <p:cNvPr id="2015645396" name="Google Shape;95;p2:notes"/>
           <p:cNvSpPr txBox="1"/>
           <p:nvPr>
             <p:ph type="body" idx="1"/>
@@ -1849,7 +1849,7 @@
       </p:sp>
       <p:sp>
         <p:nvSpPr>
-          <p:cNvPr id="902725450" name="Google Shape;96;p2:notes"/>
+          <p:cNvPr id="1898128836" name="Google Shape;96;p2:notes"/>
           <p:cNvSpPr/>
           <p:nvPr>
             <p:ph type="sldImg" idx="2"/>
@@ -1913,7 +1913,7 @@
       </p:grpSpPr>
       <p:sp>
         <p:nvSpPr>
-          <p:cNvPr id="1358484950" name="Google Shape;307;p11:notes"/>
+          <p:cNvPr id="1810423548" name="Google Shape;307;p11:notes"/>
           <p:cNvSpPr txBox="1"/>
           <p:nvPr>
             <p:ph type="body" idx="1"/>
@@ -1950,7 +1950,7 @@
       </p:sp>
       <p:sp>
         <p:nvSpPr>
-          <p:cNvPr id="858880714" name="Google Shape;308;p11:notes"/>
+          <p:cNvPr id="748923114" name="Google Shape;308;p11:notes"/>
           <p:cNvSpPr/>
           <p:nvPr>
             <p:ph type="sldImg" idx="2"/>
@@ -2014,7 +2014,7 @@
       </p:grpSpPr>
       <p:sp>
         <p:nvSpPr>
-          <p:cNvPr id="2074922467" name="Google Shape;118;p3:notes"/>
+          <p:cNvPr id="647353695" name="Google Shape;118;p3:notes"/>
           <p:cNvSpPr txBox="1"/>
           <p:nvPr>
             <p:ph type="body" idx="1"/>
@@ -2051,7 +2051,7 @@
       </p:sp>
       <p:sp>
         <p:nvSpPr>
-          <p:cNvPr id="1663830795" name="Google Shape;119;p3:notes"/>
+          <p:cNvPr id="1496450429" name="Google Shape;119;p3:notes"/>
           <p:cNvSpPr/>
           <p:nvPr>
             <p:ph type="sldImg" idx="2"/>
@@ -2115,7 +2115,7 @@
       </p:grpSpPr>
       <p:sp>
         <p:nvSpPr>
-          <p:cNvPr id="709725368" name="Google Shape;118;p3:notes"/>
+          <p:cNvPr id="1108037939" name="Google Shape;118;p3:notes"/>
           <p:cNvSpPr txBox="1"/>
           <p:nvPr>
             <p:ph type="body" idx="1"/>
@@ -2152,7 +2152,7 @@
       </p:sp>
       <p:sp>
         <p:nvSpPr>
-          <p:cNvPr id="1487444015" name="Google Shape;119;p3:notes"/>
+          <p:cNvPr id="885482141" name="Google Shape;119;p3:notes"/>
           <p:cNvSpPr/>
           <p:nvPr>
             <p:ph type="sldImg" idx="2"/>
@@ -2216,7 +2216,7 @@
       </p:grpSpPr>
       <p:sp>
         <p:nvSpPr>
-          <p:cNvPr id="1694465282" name="Google Shape;118;p3:notes"/>
+          <p:cNvPr id="2147110683" name="Google Shape;118;p3:notes"/>
           <p:cNvSpPr txBox="1"/>
           <p:nvPr>
             <p:ph type="body" idx="1"/>
@@ -2253,7 +2253,7 @@
       </p:sp>
       <p:sp>
         <p:nvSpPr>
-          <p:cNvPr id="1081368376" name="Google Shape;119;p3:notes"/>
+          <p:cNvPr id="1598445080" name="Google Shape;119;p3:notes"/>
           <p:cNvSpPr/>
           <p:nvPr>
             <p:ph type="sldImg" idx="2"/>
@@ -2317,7 +2317,7 @@
       </p:grpSpPr>
       <p:sp>
         <p:nvSpPr>
-          <p:cNvPr id="1258739927" name="Google Shape;149;p4:notes"/>
+          <p:cNvPr id="1071074486" name="Google Shape;149;p4:notes"/>
           <p:cNvSpPr txBox="1"/>
           <p:nvPr>
             <p:ph type="body" idx="1"/>
@@ -2354,7 +2354,7 @@
       </p:sp>
       <p:sp>
         <p:nvSpPr>
-          <p:cNvPr id="1742822644" name="Google Shape;150;p4:notes"/>
+          <p:cNvPr id="1806780492" name="Google Shape;150;p4:notes"/>
           <p:cNvSpPr/>
           <p:nvPr>
             <p:ph type="sldImg" idx="2"/>
@@ -2418,7 +2418,7 @@
       </p:grpSpPr>
       <p:sp>
         <p:nvSpPr>
-          <p:cNvPr id="1642762390" name="Google Shape;149;p4:notes"/>
+          <p:cNvPr id="1303377392" name="Google Shape;149;p4:notes"/>
           <p:cNvSpPr txBox="1"/>
           <p:nvPr>
             <p:ph type="body" idx="1"/>
@@ -2455,7 +2455,7 @@
       </p:sp>
       <p:sp>
         <p:nvSpPr>
-          <p:cNvPr id="1616120922" name="Google Shape;150;p4:notes"/>
+          <p:cNvPr id="204991779" name="Google Shape;150;p4:notes"/>
           <p:cNvSpPr/>
           <p:nvPr>
             <p:ph type="sldImg" idx="2"/>
@@ -2519,7 +2519,7 @@
       </p:grpSpPr>
       <p:sp>
         <p:nvSpPr>
-          <p:cNvPr id="21469770" name="Google Shape;173;p5:notes"/>
+          <p:cNvPr id="912919647" name="Google Shape;173;p5:notes"/>
           <p:cNvSpPr txBox="1"/>
           <p:nvPr>
             <p:ph type="body" idx="1"/>
@@ -2556,7 +2556,7 @@
       </p:sp>
       <p:sp>
         <p:nvSpPr>
-          <p:cNvPr id="1718172088" name="Google Shape;174;p5:notes"/>
+          <p:cNvPr id="1707796991" name="Google Shape;174;p5:notes"/>
           <p:cNvSpPr/>
           <p:nvPr>
             <p:ph type="sldImg" idx="2"/>
@@ -2620,7 +2620,7 @@
       </p:grpSpPr>
       <p:sp>
         <p:nvSpPr>
-          <p:cNvPr id="2075000332" name="Google Shape;173;p5:notes"/>
+          <p:cNvPr id="2096230824" name="Google Shape;173;p5:notes"/>
           <p:cNvSpPr txBox="1"/>
           <p:nvPr>
             <p:ph type="body" idx="1"/>
@@ -2657,7 +2657,7 @@
       </p:sp>
       <p:sp>
         <p:nvSpPr>
-          <p:cNvPr id="485568663" name="Google Shape;174;p5:notes"/>
+          <p:cNvPr id="1835367598" name="Google Shape;174;p5:notes"/>
           <p:cNvSpPr/>
           <p:nvPr>
             <p:ph type="sldImg" idx="2"/>
@@ -2721,7 +2721,7 @@
       </p:grpSpPr>
       <p:sp>
         <p:nvSpPr>
-          <p:cNvPr id="400921082" name="Google Shape;12;p2"/>
+          <p:cNvPr id="1744909148" name="Google Shape;12;p2"/>
           <p:cNvSpPr txBox="1"/>
           <p:nvPr>
             <p:ph type="dt" idx="10"/>
@@ -2859,7 +2859,7 @@
       </p:sp>
       <p:sp>
         <p:nvSpPr>
-          <p:cNvPr id="934389186" name="Google Shape;13;p2"/>
+          <p:cNvPr id="1491723577" name="Google Shape;13;p2"/>
           <p:cNvSpPr txBox="1"/>
           <p:nvPr>
             <p:ph type="ftr" idx="11"/>
@@ -2997,7 +2997,7 @@
       </p:sp>
       <p:sp>
         <p:nvSpPr>
-          <p:cNvPr id="2077269349" name="Google Shape;14;p2"/>
+          <p:cNvPr id="390581198" name="Google Shape;14;p2"/>
           <p:cNvSpPr txBox="1"/>
           <p:nvPr>
             <p:ph type="sldNum" idx="12"/>
@@ -3131,7 +3131,7 @@
       </p:grpSpPr>
       <p:sp>
         <p:nvSpPr>
-          <p:cNvPr id="1279170525" name="Google Shape;69;p11"/>
+          <p:cNvPr id="1107650817" name="Google Shape;69;p11"/>
           <p:cNvSpPr txBox="1"/>
           <p:nvPr>
             <p:ph type="title"/>
@@ -3268,7 +3268,7 @@
       </p:sp>
       <p:sp>
         <p:nvSpPr>
-          <p:cNvPr id="130849333" name="Google Shape;70;p11"/>
+          <p:cNvPr id="1439542706" name="Google Shape;70;p11"/>
           <p:cNvSpPr txBox="1"/>
           <p:nvPr>
             <p:ph type="body" idx="1"/>
@@ -3429,7 +3429,7 @@
       </p:sp>
       <p:sp>
         <p:nvSpPr>
-          <p:cNvPr id="214401358" name="Google Shape;71;p11"/>
+          <p:cNvPr id="1415415981" name="Google Shape;71;p11"/>
           <p:cNvSpPr txBox="1"/>
           <p:nvPr>
             <p:ph type="dt" idx="10"/>
@@ -3567,7 +3567,7 @@
       </p:sp>
       <p:sp>
         <p:nvSpPr>
-          <p:cNvPr id="1985627988" name="Google Shape;72;p11"/>
+          <p:cNvPr id="1453108092" name="Google Shape;72;p11"/>
           <p:cNvSpPr txBox="1"/>
           <p:nvPr>
             <p:ph type="ftr" idx="11"/>
@@ -3705,7 +3705,7 @@
       </p:sp>
       <p:sp>
         <p:nvSpPr>
-          <p:cNvPr id="1987041123" name="Google Shape;73;p11"/>
+          <p:cNvPr id="1401653849" name="Google Shape;73;p11"/>
           <p:cNvSpPr txBox="1"/>
           <p:nvPr>
             <p:ph type="sldNum" idx="12"/>
@@ -3839,7 +3839,7 @@
       </p:grpSpPr>
       <p:sp>
         <p:nvSpPr>
-          <p:cNvPr id="937404531" name="Google Shape;75;p12"/>
+          <p:cNvPr id="776267701" name="Google Shape;75;p12"/>
           <p:cNvSpPr txBox="1"/>
           <p:nvPr>
             <p:ph type="title"/>
@@ -3976,7 +3976,7 @@
       </p:sp>
       <p:sp>
         <p:nvSpPr>
-          <p:cNvPr id="275536376" name="Google Shape;76;p12"/>
+          <p:cNvPr id="1209686979" name="Google Shape;76;p12"/>
           <p:cNvSpPr txBox="1"/>
           <p:nvPr>
             <p:ph type="body" idx="1"/>
@@ -4137,7 +4137,7 @@
       </p:sp>
       <p:sp>
         <p:nvSpPr>
-          <p:cNvPr id="266702483" name="Google Shape;77;p12"/>
+          <p:cNvPr id="1284751860" name="Google Shape;77;p12"/>
           <p:cNvSpPr txBox="1"/>
           <p:nvPr>
             <p:ph type="dt" idx="10"/>
@@ -4275,7 +4275,7 @@
       </p:sp>
       <p:sp>
         <p:nvSpPr>
-          <p:cNvPr id="756585304" name="Google Shape;78;p12"/>
+          <p:cNvPr id="1476580644" name="Google Shape;78;p12"/>
           <p:cNvSpPr txBox="1"/>
           <p:nvPr>
             <p:ph type="ftr" idx="11"/>
@@ -4413,7 +4413,7 @@
       </p:sp>
       <p:sp>
         <p:nvSpPr>
-          <p:cNvPr id="217915251" name="Google Shape;79;p12"/>
+          <p:cNvPr id="1185827221" name="Google Shape;79;p12"/>
           <p:cNvSpPr txBox="1"/>
           <p:nvPr>
             <p:ph type="sldNum" idx="12"/>
@@ -4547,7 +4547,7 @@
       </p:grpSpPr>
       <p:sp>
         <p:nvSpPr>
-          <p:cNvPr id="1109956477" name="Google Shape;16;p3"/>
+          <p:cNvPr id="1912149891" name="Google Shape;16;p3"/>
           <p:cNvSpPr txBox="1"/>
           <p:nvPr>
             <p:ph type="ctrTitle"/>
@@ -4684,7 +4684,7 @@
       </p:sp>
       <p:sp>
         <p:nvSpPr>
-          <p:cNvPr id="1501925482" name="Google Shape;17;p3"/>
+          <p:cNvPr id="1624447564" name="Google Shape;17;p3"/>
           <p:cNvSpPr txBox="1"/>
           <p:nvPr>
             <p:ph type="subTitle" idx="1"/>
@@ -4881,7 +4881,7 @@
       </p:sp>
       <p:sp>
         <p:nvSpPr>
-          <p:cNvPr id="1136999659" name="Google Shape;18;p3"/>
+          <p:cNvPr id="971972504" name="Google Shape;18;p3"/>
           <p:cNvSpPr txBox="1"/>
           <p:nvPr>
             <p:ph type="dt" idx="10"/>
@@ -5019,7 +5019,7 @@
       </p:sp>
       <p:sp>
         <p:nvSpPr>
-          <p:cNvPr id="1663457052" name="Google Shape;19;p3"/>
+          <p:cNvPr id="1516042826" name="Google Shape;19;p3"/>
           <p:cNvSpPr txBox="1"/>
           <p:nvPr>
             <p:ph type="ftr" idx="11"/>
@@ -5157,7 +5157,7 @@
       </p:sp>
       <p:sp>
         <p:nvSpPr>
-          <p:cNvPr id="512994360" name="Google Shape;20;p3"/>
+          <p:cNvPr id="1253064556" name="Google Shape;20;p3"/>
           <p:cNvSpPr txBox="1"/>
           <p:nvPr>
             <p:ph type="sldNum" idx="12"/>
@@ -5291,7 +5291,7 @@
       </p:grpSpPr>
       <p:sp>
         <p:nvSpPr>
-          <p:cNvPr id="1074535888" name="Google Shape;22;p4"/>
+          <p:cNvPr id="684794268" name="Google Shape;22;p4"/>
           <p:cNvSpPr txBox="1"/>
           <p:nvPr>
             <p:ph type="title"/>
@@ -5428,7 +5428,7 @@
       </p:sp>
       <p:sp>
         <p:nvSpPr>
-          <p:cNvPr id="1166272070" name="Google Shape;23;p4"/>
+          <p:cNvPr id="1373082651" name="Google Shape;23;p4"/>
           <p:cNvSpPr txBox="1"/>
           <p:nvPr>
             <p:ph type="body" idx="1"/>
@@ -5589,7 +5589,7 @@
       </p:sp>
       <p:sp>
         <p:nvSpPr>
-          <p:cNvPr id="1031410983" name="Google Shape;24;p4"/>
+          <p:cNvPr id="1204701738" name="Google Shape;24;p4"/>
           <p:cNvSpPr txBox="1"/>
           <p:nvPr>
             <p:ph type="dt" idx="10"/>
@@ -5727,7 +5727,7 @@
       </p:sp>
       <p:sp>
         <p:nvSpPr>
-          <p:cNvPr id="1860090974" name="Google Shape;25;p4"/>
+          <p:cNvPr id="1258134241" name="Google Shape;25;p4"/>
           <p:cNvSpPr txBox="1"/>
           <p:nvPr>
             <p:ph type="ftr" idx="11"/>
@@ -5865,7 +5865,7 @@
       </p:sp>
       <p:sp>
         <p:nvSpPr>
-          <p:cNvPr id="742828963" name="Google Shape;26;p4"/>
+          <p:cNvPr id="1067000168" name="Google Shape;26;p4"/>
           <p:cNvSpPr txBox="1"/>
           <p:nvPr>
             <p:ph type="sldNum" idx="12"/>
@@ -5999,7 +5999,7 @@
       </p:grpSpPr>
       <p:sp>
         <p:nvSpPr>
-          <p:cNvPr id="225753546" name="Google Shape;28;p5"/>
+          <p:cNvPr id="764426068" name="Google Shape;28;p5"/>
           <p:cNvSpPr txBox="1"/>
           <p:nvPr>
             <p:ph type="title"/>
@@ -6137,7 +6137,7 @@
       </p:sp>
       <p:sp>
         <p:nvSpPr>
-          <p:cNvPr id="225586827" name="Google Shape;29;p5"/>
+          <p:cNvPr id="1110554297" name="Google Shape;29;p5"/>
           <p:cNvSpPr txBox="1"/>
           <p:nvPr>
             <p:ph type="body" idx="1"/>
@@ -6334,7 +6334,7 @@
       </p:sp>
       <p:sp>
         <p:nvSpPr>
-          <p:cNvPr id="568395741" name="Google Shape;30;p5"/>
+          <p:cNvPr id="115523141" name="Google Shape;30;p5"/>
           <p:cNvSpPr txBox="1"/>
           <p:nvPr>
             <p:ph type="dt" idx="10"/>
@@ -6472,7 +6472,7 @@
       </p:sp>
       <p:sp>
         <p:nvSpPr>
-          <p:cNvPr id="1681573839" name="Google Shape;31;p5"/>
+          <p:cNvPr id="1631508655" name="Google Shape;31;p5"/>
           <p:cNvSpPr txBox="1"/>
           <p:nvPr>
             <p:ph type="ftr" idx="11"/>
@@ -6610,7 +6610,7 @@
       </p:sp>
       <p:sp>
         <p:nvSpPr>
-          <p:cNvPr id="274667772" name="Google Shape;32;p5"/>
+          <p:cNvPr id="320077124" name="Google Shape;32;p5"/>
           <p:cNvSpPr txBox="1"/>
           <p:nvPr>
             <p:ph type="sldNum" idx="12"/>
@@ -6744,7 +6744,7 @@
       </p:grpSpPr>
       <p:sp>
         <p:nvSpPr>
-          <p:cNvPr id="1298420655" name="Google Shape;34;p6"/>
+          <p:cNvPr id="1495791872" name="Google Shape;34;p6"/>
           <p:cNvSpPr txBox="1"/>
           <p:nvPr>
             <p:ph type="title"/>
@@ -6881,7 +6881,7 @@
       </p:sp>
       <p:sp>
         <p:nvSpPr>
-          <p:cNvPr id="656432875" name="Google Shape;35;p6"/>
+          <p:cNvPr id="807509560" name="Google Shape;35;p6"/>
           <p:cNvSpPr txBox="1"/>
           <p:nvPr>
             <p:ph type="body" idx="1"/>
@@ -7042,7 +7042,7 @@
       </p:sp>
       <p:sp>
         <p:nvSpPr>
-          <p:cNvPr id="72662614" name="Google Shape;36;p6"/>
+          <p:cNvPr id="537849936" name="Google Shape;36;p6"/>
           <p:cNvSpPr txBox="1"/>
           <p:nvPr>
             <p:ph type="body" idx="2"/>
@@ -7203,7 +7203,7 @@
       </p:sp>
       <p:sp>
         <p:nvSpPr>
-          <p:cNvPr id="1004625844" name="Google Shape;37;p6"/>
+          <p:cNvPr id="104935751" name="Google Shape;37;p6"/>
           <p:cNvSpPr txBox="1"/>
           <p:nvPr>
             <p:ph type="dt" idx="10"/>
@@ -7341,7 +7341,7 @@
       </p:sp>
       <p:sp>
         <p:nvSpPr>
-          <p:cNvPr id="1998884934" name="Google Shape;38;p6"/>
+          <p:cNvPr id="788686774" name="Google Shape;38;p6"/>
           <p:cNvSpPr txBox="1"/>
           <p:nvPr>
             <p:ph type="ftr" idx="11"/>
@@ -7479,7 +7479,7 @@
       </p:sp>
       <p:sp>
         <p:nvSpPr>
-          <p:cNvPr id="1848106543" name="Google Shape;39;p6"/>
+          <p:cNvPr id="122242339" name="Google Shape;39;p6"/>
           <p:cNvSpPr txBox="1"/>
           <p:nvPr>
             <p:ph type="sldNum" idx="12"/>
@@ -7613,7 +7613,7 @@
       </p:grpSpPr>
       <p:sp>
         <p:nvSpPr>
-          <p:cNvPr id="178198708" name="Google Shape;41;p7"/>
+          <p:cNvPr id="1580840447" name="Google Shape;41;p7"/>
           <p:cNvSpPr txBox="1"/>
           <p:nvPr>
             <p:ph type="title"/>
@@ -7751,7 +7751,7 @@
       </p:sp>
       <p:sp>
         <p:nvSpPr>
-          <p:cNvPr id="1443922501" name="Google Shape;42;p7"/>
+          <p:cNvPr id="1007402037" name="Google Shape;42;p7"/>
           <p:cNvSpPr txBox="1"/>
           <p:nvPr>
             <p:ph type="body" idx="1"/>
@@ -7912,7 +7912,7 @@
       </p:sp>
       <p:sp>
         <p:nvSpPr>
-          <p:cNvPr id="754146274" name="Google Shape;43;p7"/>
+          <p:cNvPr id="1238191931" name="Google Shape;43;p7"/>
           <p:cNvSpPr txBox="1"/>
           <p:nvPr>
             <p:ph type="body" idx="2"/>
@@ -8073,7 +8073,7 @@
       </p:sp>
       <p:sp>
         <p:nvSpPr>
-          <p:cNvPr id="176600883" name="Google Shape;44;p7"/>
+          <p:cNvPr id="1018571498" name="Google Shape;44;p7"/>
           <p:cNvSpPr txBox="1"/>
           <p:nvPr>
             <p:ph type="body" idx="3"/>
@@ -8234,7 +8234,7 @@
       </p:sp>
       <p:sp>
         <p:nvSpPr>
-          <p:cNvPr id="5460085" name="Google Shape;45;p7"/>
+          <p:cNvPr id="1349846208" name="Google Shape;45;p7"/>
           <p:cNvSpPr txBox="1"/>
           <p:nvPr>
             <p:ph type="body" idx="4"/>
@@ -8395,7 +8395,7 @@
       </p:sp>
       <p:sp>
         <p:nvSpPr>
-          <p:cNvPr id="446864992" name="Google Shape;46;p7"/>
+          <p:cNvPr id="1842590021" name="Google Shape;46;p7"/>
           <p:cNvSpPr txBox="1"/>
           <p:nvPr>
             <p:ph type="dt" idx="10"/>
@@ -8533,7 +8533,7 @@
       </p:sp>
       <p:sp>
         <p:nvSpPr>
-          <p:cNvPr id="411228804" name="Google Shape;47;p7"/>
+          <p:cNvPr id="1892353817" name="Google Shape;47;p7"/>
           <p:cNvSpPr txBox="1"/>
           <p:nvPr>
             <p:ph type="ftr" idx="11"/>
@@ -8671,7 +8671,7 @@
       </p:sp>
       <p:sp>
         <p:nvSpPr>
-          <p:cNvPr id="961624888" name="Google Shape;48;p7"/>
+          <p:cNvPr id="2088148806" name="Google Shape;48;p7"/>
           <p:cNvSpPr txBox="1"/>
           <p:nvPr>
             <p:ph type="sldNum" idx="12"/>
@@ -8805,7 +8805,7 @@
       </p:grpSpPr>
       <p:sp>
         <p:nvSpPr>
-          <p:cNvPr id="1717767226" name="Google Shape;50;p8"/>
+          <p:cNvPr id="442820322" name="Google Shape;50;p8"/>
           <p:cNvSpPr txBox="1"/>
           <p:nvPr>
             <p:ph type="title"/>
@@ -8942,7 +8942,7 @@
       </p:sp>
       <p:sp>
         <p:nvSpPr>
-          <p:cNvPr id="1289732317" name="Google Shape;51;p8"/>
+          <p:cNvPr id="1069698023" name="Google Shape;51;p8"/>
           <p:cNvSpPr txBox="1"/>
           <p:nvPr>
             <p:ph type="dt" idx="10"/>
@@ -9080,7 +9080,7 @@
       </p:sp>
       <p:sp>
         <p:nvSpPr>
-          <p:cNvPr id="1378534758" name="Google Shape;52;p8"/>
+          <p:cNvPr id="1905673463" name="Google Shape;52;p8"/>
           <p:cNvSpPr txBox="1"/>
           <p:nvPr>
             <p:ph type="ftr" idx="11"/>
@@ -9218,7 +9218,7 @@
       </p:sp>
       <p:sp>
         <p:nvSpPr>
-          <p:cNvPr id="598398918" name="Google Shape;53;p8"/>
+          <p:cNvPr id="922392254" name="Google Shape;53;p8"/>
           <p:cNvSpPr txBox="1"/>
           <p:nvPr>
             <p:ph type="sldNum" idx="12"/>
@@ -9352,7 +9352,7 @@
       </p:grpSpPr>
       <p:sp>
         <p:nvSpPr>
-          <p:cNvPr id="1194586323" name="Google Shape;55;p9"/>
+          <p:cNvPr id="803685694" name="Google Shape;55;p9"/>
           <p:cNvSpPr txBox="1"/>
           <p:nvPr>
             <p:ph type="title"/>
@@ -9490,7 +9490,7 @@
       </p:sp>
       <p:sp>
         <p:nvSpPr>
-          <p:cNvPr id="283660064" name="Google Shape;56;p9"/>
+          <p:cNvPr id="528216843" name="Google Shape;56;p9"/>
           <p:cNvSpPr txBox="1"/>
           <p:nvPr>
             <p:ph type="body" idx="1"/>
@@ -9651,7 +9651,7 @@
       </p:sp>
       <p:sp>
         <p:nvSpPr>
-          <p:cNvPr id="317195647" name="Google Shape;57;p9"/>
+          <p:cNvPr id="167945188" name="Google Shape;57;p9"/>
           <p:cNvSpPr txBox="1"/>
           <p:nvPr>
             <p:ph type="body" idx="2"/>
@@ -9812,7 +9812,7 @@
       </p:sp>
       <p:sp>
         <p:nvSpPr>
-          <p:cNvPr id="704146515" name="Google Shape;58;p9"/>
+          <p:cNvPr id="374489576" name="Google Shape;58;p9"/>
           <p:cNvSpPr txBox="1"/>
           <p:nvPr>
             <p:ph type="dt" idx="10"/>
@@ -9950,7 +9950,7 @@
       </p:sp>
       <p:sp>
         <p:nvSpPr>
-          <p:cNvPr id="588334333" name="Google Shape;59;p9"/>
+          <p:cNvPr id="1742973169" name="Google Shape;59;p9"/>
           <p:cNvSpPr txBox="1"/>
           <p:nvPr>
             <p:ph type="ftr" idx="11"/>
@@ -10088,7 +10088,7 @@
       </p:sp>
       <p:sp>
         <p:nvSpPr>
-          <p:cNvPr id="1002063483" name="Google Shape;60;p9"/>
+          <p:cNvPr id="260856451" name="Google Shape;60;p9"/>
           <p:cNvSpPr txBox="1"/>
           <p:nvPr>
             <p:ph type="sldNum" idx="12"/>
@@ -10222,7 +10222,7 @@
       </p:grpSpPr>
       <p:sp>
         <p:nvSpPr>
-          <p:cNvPr id="1306073661" name="Google Shape;62;p10"/>
+          <p:cNvPr id="2031129166" name="Google Shape;62;p10"/>
           <p:cNvSpPr txBox="1"/>
           <p:nvPr>
             <p:ph type="title"/>
@@ -10360,7 +10360,7 @@
       </p:sp>
       <p:sp>
         <p:nvSpPr>
-          <p:cNvPr id="31238613" name="Google Shape;63;p10"/>
+          <p:cNvPr id="110858030" name="Google Shape;63;p10"/>
           <p:cNvSpPr/>
           <p:nvPr>
             <p:ph type="pic" idx="2"/>
@@ -10382,7 +10382,7 @@
       </p:sp>
       <p:sp>
         <p:nvSpPr>
-          <p:cNvPr id="1720238910" name="Google Shape;64;p10"/>
+          <p:cNvPr id="1338242697" name="Google Shape;64;p10"/>
           <p:cNvSpPr txBox="1"/>
           <p:nvPr>
             <p:ph type="body" idx="1"/>
@@ -10543,7 +10543,7 @@
       </p:sp>
       <p:sp>
         <p:nvSpPr>
-          <p:cNvPr id="1252031086" name="Google Shape;65;p10"/>
+          <p:cNvPr id="1208983946" name="Google Shape;65;p10"/>
           <p:cNvSpPr txBox="1"/>
           <p:nvPr>
             <p:ph type="dt" idx="10"/>
@@ -10681,7 +10681,7 @@
       </p:sp>
       <p:sp>
         <p:nvSpPr>
-          <p:cNvPr id="1197673609" name="Google Shape;66;p10"/>
+          <p:cNvPr id="731047193" name="Google Shape;66;p10"/>
           <p:cNvSpPr txBox="1"/>
           <p:nvPr>
             <p:ph type="ftr" idx="11"/>
@@ -10819,7 +10819,7 @@
       </p:sp>
       <p:sp>
         <p:nvSpPr>
-          <p:cNvPr id="903698780" name="Google Shape;67;p10"/>
+          <p:cNvPr id="1228199227" name="Google Shape;67;p10"/>
           <p:cNvSpPr txBox="1"/>
           <p:nvPr>
             <p:ph type="sldNum" idx="12"/>
@@ -10960,7 +10960,7 @@
       </p:grpSpPr>
       <p:sp>
         <p:nvSpPr>
-          <p:cNvPr id="1902305207" name="Google Shape;6;p1"/>
+          <p:cNvPr id="495170072" name="Google Shape;6;p1"/>
           <p:cNvSpPr txBox="1"/>
           <p:nvPr>
             <p:ph type="title"/>
@@ -11105,7 +11105,7 @@
       </p:sp>
       <p:sp>
         <p:nvSpPr>
-          <p:cNvPr id="1445856386" name="Google Shape;7;p1"/>
+          <p:cNvPr id="1297652766" name="Google Shape;7;p1"/>
           <p:cNvSpPr txBox="1"/>
           <p:nvPr>
             <p:ph type="body" idx="1"/>
@@ -11338,7 +11338,7 @@
       </p:sp>
       <p:sp>
         <p:nvSpPr>
-          <p:cNvPr id="75539859" name="Google Shape;8;p1"/>
+          <p:cNvPr id="575103934" name="Google Shape;8;p1"/>
           <p:cNvSpPr txBox="1"/>
           <p:nvPr>
             <p:ph type="dt" idx="10"/>
@@ -11539,7 +11539,7 @@
       </p:sp>
       <p:sp>
         <p:nvSpPr>
-          <p:cNvPr id="1432839095" name="Google Shape;9;p1"/>
+          <p:cNvPr id="1203299622" name="Google Shape;9;p1"/>
           <p:cNvSpPr txBox="1"/>
           <p:nvPr>
             <p:ph type="ftr" idx="11"/>
@@ -11740,7 +11740,7 @@
       </p:sp>
       <p:sp>
         <p:nvSpPr>
-          <p:cNvPr id="34517576" name="Google Shape;10;p1"/>
+          <p:cNvPr id="689327313" name="Google Shape;10;p1"/>
           <p:cNvSpPr txBox="1"/>
           <p:nvPr>
             <p:ph type="sldNum" idx="12"/>
@@ -12618,7 +12618,7 @@
       </p:grpSpPr>
       <p:pic>
         <p:nvPicPr>
-          <p:cNvPr id="10375844" name="Google Shape;84;p13" descr="image.png"/>
+          <p:cNvPr id="593904613" name="Google Shape;84;p13" descr="image.png"/>
           <p:cNvPicPr/>
           <p:nvPr/>
         </p:nvPicPr>
@@ -12645,7 +12645,7 @@
       </p:pic>
       <p:sp>
         <p:nvSpPr>
-          <p:cNvPr id="1645864594" name="Titolo 1"/>
+          <p:cNvPr id="1511807213" name="Titolo 1"/>
           <p:cNvSpPr>
             <a:spLocks noGrp="1"/>
           </p:cNvSpPr>
@@ -12926,7 +12926,7 @@
       </p:sp>
       <p:sp>
         <p:nvSpPr>
-          <p:cNvPr id="1906335373" name="Segnaposto testo 4"/>
+          <p:cNvPr id="817253225" name="Segnaposto testo 4"/>
           <p:cNvSpPr>
             <a:spLocks noGrp="1"/>
           </p:cNvSpPr>
@@ -13213,7 +13213,7 @@
       </p:sp>
       <p:sp>
         <p:nvSpPr>
-          <p:cNvPr id="59399456" name="Segnaposto testo 7"/>
+          <p:cNvPr id="1771125056" name="Segnaposto testo 7"/>
           <p:cNvSpPr>
             <a:spLocks noGrp="1"/>
           </p:cNvSpPr>
@@ -13541,7 +13541,7 @@
       </p:sp>
       <p:pic>
         <p:nvPicPr>
-          <p:cNvPr id="855074577" name="Picture 1273133703"/>
+          <p:cNvPr id="1273747839" name="Picture 1273133703"/>
           <p:cNvPicPr>
             <a:picLocks noChangeAspect="1"/>
           </p:cNvPicPr>
@@ -13569,7 +13569,7 @@
       </p:pic>
       <p:pic>
         <p:nvPicPr>
-          <p:cNvPr id="568189283" name=""/>
+          <p:cNvPr id="13780843" name=""/>
           <p:cNvPicPr>
             <a:picLocks noChangeAspect="1"/>
           </p:cNvPicPr>
@@ -13597,7 +13597,7 @@
       </p:pic>
       <p:pic>
         <p:nvPicPr>
-          <p:cNvPr id="53659025" name=""/>
+          <p:cNvPr id="1003589391" name=""/>
           <p:cNvPicPr>
             <a:picLocks noChangeAspect="1"/>
           </p:cNvPicPr>
@@ -13665,7 +13665,7 @@
       </p:grpSpPr>
       <p:pic>
         <p:nvPicPr>
-          <p:cNvPr id="1996936812" name="Google Shape;204;p18" descr="image.png"/>
+          <p:cNvPr id="65050549" name="Google Shape;204;p18" descr="image.png"/>
           <p:cNvPicPr/>
           <p:nvPr/>
         </p:nvPicPr>
@@ -13678,7 +13678,7 @@
         </p:blipFill>
         <p:spPr bwMode="auto">
           <a:xfrm>
-            <a:off x="-27494" y="-78556"/>
+            <a:off x="-27494" y="-78555"/>
             <a:ext cx="12192000" cy="6858000"/>
           </a:xfrm>
           <a:prstGeom prst="rect">
@@ -13692,7 +13692,7 @@
       </p:pic>
       <p:sp>
         <p:nvSpPr>
-          <p:cNvPr id="1516316314" name="Google Shape;178;p17"/>
+          <p:cNvPr id="1196895619" name="Google Shape;178;p17"/>
           <p:cNvSpPr txBox="1"/>
           <p:nvPr/>
         </p:nvSpPr>
@@ -13742,7 +13742,7 @@
       </p:sp>
       <p:pic>
         <p:nvPicPr>
-          <p:cNvPr id="828673794" name="Google Shape;180;p17" descr="image.png"/>
+          <p:cNvPr id="1516813795" name="Google Shape;180;p17" descr="image.png"/>
           <p:cNvPicPr/>
           <p:nvPr/>
         </p:nvPicPr>
@@ -13769,14 +13769,14 @@
       </p:pic>
       <p:sp>
         <p:nvSpPr>
-          <p:cNvPr id="1277757528" name=""/>
+          <p:cNvPr id="1083958591" name=""/>
           <p:cNvSpPr/>
           <p:nvPr/>
         </p:nvSpPr>
         <p:spPr bwMode="auto">
           <a:xfrm rot="0" flipH="0" flipV="0">
             <a:off x="3409407" y="3099611"/>
-            <a:ext cx="2150489" cy="363324"/>
+            <a:ext cx="2150489" cy="363323"/>
           </a:xfrm>
           <a:prstGeom prst="roundRect">
             <a:avLst>
@@ -13959,7 +13959,7 @@
       </p:sp>
       <p:grpSp>
         <p:nvGrpSpPr>
-          <p:cNvPr id="494172456" name=""/>
+          <p:cNvPr id="1035111056" name=""/>
           <p:cNvGrpSpPr/>
           <p:nvPr/>
         </p:nvGrpSpPr>
@@ -14174,7 +14174,7 @@
           <p:spPr bwMode="auto">
             <a:xfrm rot="0" flipH="0" flipV="0">
               <a:off x="5419117" y="827852"/>
-              <a:ext cx="240223" cy="325731"/>
+              <a:ext cx="240222" cy="325731"/>
             </a:xfrm>
             <a:prstGeom prst="chevron">
               <a:avLst>
@@ -14224,7 +14224,7 @@
           <p:spPr bwMode="auto">
             <a:xfrm rot="0" flipH="0" flipV="0">
               <a:off x="8340640" y="827852"/>
-              <a:ext cx="240223" cy="325731"/>
+              <a:ext cx="240222" cy="325731"/>
             </a:xfrm>
             <a:prstGeom prst="chevron">
               <a:avLst>
@@ -14533,7 +14533,7 @@
             <p:spPr bwMode="auto">
               <a:xfrm rot="0" flipH="0" flipV="0">
                 <a:off x="194277" y="1415577"/>
-                <a:ext cx="2150489" cy="363324"/>
+                <a:ext cx="2150489" cy="363323"/>
               </a:xfrm>
               <a:prstGeom prst="roundRect">
                 <a:avLst>
@@ -15145,7 +15145,7 @@
       </p:grpSpPr>
       <p:pic>
         <p:nvPicPr>
-          <p:cNvPr id="971646970" name="Google Shape;204;p18" descr="image.png"/>
+          <p:cNvPr id="1024954136" name="Google Shape;204;p18" descr="image.png"/>
           <p:cNvPicPr/>
           <p:nvPr/>
         </p:nvPicPr>
@@ -15158,7 +15158,7 @@
         </p:blipFill>
         <p:spPr bwMode="auto">
           <a:xfrm>
-            <a:off x="-27494" y="-78556"/>
+            <a:off x="-27494" y="-78555"/>
             <a:ext cx="12191999" cy="6858000"/>
           </a:xfrm>
           <a:prstGeom prst="rect">
@@ -15172,7 +15172,7 @@
       </p:pic>
       <p:sp>
         <p:nvSpPr>
-          <p:cNvPr id="1368228288" name="Google Shape;178;p17"/>
+          <p:cNvPr id="448190473" name="Google Shape;178;p17"/>
           <p:cNvSpPr txBox="1"/>
           <p:nvPr/>
         </p:nvSpPr>
@@ -15222,7 +15222,7 @@
       </p:sp>
       <p:pic>
         <p:nvPicPr>
-          <p:cNvPr id="1031654270" name="Google Shape;180;p17" descr="image.png"/>
+          <p:cNvPr id="1909452654" name="Google Shape;180;p17" descr="image.png"/>
           <p:cNvPicPr/>
           <p:nvPr/>
         </p:nvPicPr>
@@ -15289,7 +15289,7 @@
       </p:grpSpPr>
       <p:pic>
         <p:nvPicPr>
-          <p:cNvPr id="228168146" name="Google Shape;204;p18" descr="image.png"/>
+          <p:cNvPr id="406325890" name="Google Shape;204;p18" descr="image.png"/>
           <p:cNvPicPr/>
           <p:nvPr/>
         </p:nvPicPr>
@@ -15302,7 +15302,7 @@
         </p:blipFill>
         <p:spPr bwMode="auto">
           <a:xfrm>
-            <a:off x="-27494" y="-78556"/>
+            <a:off x="-27494" y="-78555"/>
             <a:ext cx="12191999" cy="6858000"/>
           </a:xfrm>
           <a:prstGeom prst="rect">
@@ -15316,7 +15316,7 @@
       </p:pic>
       <p:sp>
         <p:nvSpPr>
-          <p:cNvPr id="88519281" name="Google Shape;178;p17"/>
+          <p:cNvPr id="257860372" name="Google Shape;178;p17"/>
           <p:cNvSpPr txBox="1"/>
           <p:nvPr/>
         </p:nvSpPr>
@@ -15366,7 +15366,7 @@
       </p:sp>
       <p:pic>
         <p:nvPicPr>
-          <p:cNvPr id="112265567" name="Google Shape;180;p17" descr="image.png"/>
+          <p:cNvPr id="1955833796" name="Google Shape;180;p17" descr="image.png"/>
           <p:cNvPicPr/>
           <p:nvPr/>
         </p:nvPicPr>
@@ -15433,7 +15433,7 @@
       </p:grpSpPr>
       <p:pic>
         <p:nvPicPr>
-          <p:cNvPr id="663424982" name="Google Shape;221;p19" descr="image.png"/>
+          <p:cNvPr id="1747818378" name="Google Shape;221;p19" descr="image.png"/>
           <p:cNvPicPr/>
           <p:nvPr/>
         </p:nvPicPr>
@@ -15460,7 +15460,7 @@
       </p:pic>
       <p:sp>
         <p:nvSpPr>
-          <p:cNvPr id="497312096" name="Google Shape;223;p19"/>
+          <p:cNvPr id="1217392276" name="Google Shape;223;p19"/>
           <p:cNvSpPr txBox="1"/>
           <p:nvPr/>
         </p:nvSpPr>
@@ -15510,7 +15510,7 @@
       </p:sp>
       <p:pic>
         <p:nvPicPr>
-          <p:cNvPr id="797474069" name="Google Shape;225;p19" descr="image.png"/>
+          <p:cNvPr id="2032455435" name="Google Shape;225;p19" descr="image.png"/>
           <p:cNvPicPr/>
           <p:nvPr/>
         </p:nvPicPr>
@@ -15537,7 +15537,7 @@
       </p:pic>
       <p:sp>
         <p:nvSpPr>
-          <p:cNvPr id="258964390" name="Google Shape;226;p19"/>
+          <p:cNvPr id="1687995485" name="Google Shape;226;p19"/>
           <p:cNvSpPr txBox="1"/>
           <p:nvPr/>
         </p:nvSpPr>
@@ -15587,7 +15587,7 @@
       </p:sp>
       <p:sp>
         <p:nvSpPr>
-          <p:cNvPr id="1173423808" name="Google Shape;227;p19"/>
+          <p:cNvPr id="560535427" name="Google Shape;227;p19"/>
           <p:cNvSpPr txBox="1"/>
           <p:nvPr/>
         </p:nvSpPr>
@@ -15662,7 +15662,7 @@
       </p:sp>
       <p:sp>
         <p:nvSpPr>
-          <p:cNvPr id="1865708889" name=""/>
+          <p:cNvPr id="1929136527" name=""/>
           <p:cNvSpPr txBox="1"/>
           <p:nvPr/>
         </p:nvSpPr>
@@ -15828,7 +15828,7 @@
       </p:sp>
       <p:pic>
         <p:nvPicPr>
-          <p:cNvPr id="1737222623" name=""/>
+          <p:cNvPr id="733846567" name=""/>
           <p:cNvPicPr>
             <a:picLocks noChangeAspect="1"/>
           </p:cNvPicPr>
@@ -15896,7 +15896,7 @@
       </p:grpSpPr>
       <p:pic>
         <p:nvPicPr>
-          <p:cNvPr id="390725331" name="Google Shape;221;p19" descr="image.png"/>
+          <p:cNvPr id="206061752" name="Google Shape;221;p19" descr="image.png"/>
           <p:cNvPicPr/>
           <p:nvPr/>
         </p:nvPicPr>
@@ -15923,7 +15923,7 @@
       </p:pic>
       <p:sp>
         <p:nvSpPr>
-          <p:cNvPr id="1354551728" name="Google Shape;223;p19"/>
+          <p:cNvPr id="1559817407" name="Google Shape;223;p19"/>
           <p:cNvSpPr txBox="1"/>
           <p:nvPr/>
         </p:nvSpPr>
@@ -15973,7 +15973,7 @@
       </p:sp>
       <p:pic>
         <p:nvPicPr>
-          <p:cNvPr id="413766537" name="Google Shape;225;p19" descr="image.png"/>
+          <p:cNvPr id="856060595" name="Google Shape;225;p19" descr="image.png"/>
           <p:cNvPicPr/>
           <p:nvPr/>
         </p:nvPicPr>
@@ -16000,16 +16000,16 @@
       </p:pic>
       <p:grpSp>
         <p:nvGrpSpPr>
-          <p:cNvPr id="2069022804" name=""/>
+          <p:cNvPr id="872398356" name=""/>
           <p:cNvGrpSpPr/>
           <p:nvPr/>
         </p:nvGrpSpPr>
         <p:grpSpPr bwMode="auto">
           <a:xfrm>
-            <a:off x="3255426" y="1003988"/>
-            <a:ext cx="5916973" cy="5575394"/>
+            <a:off x="3255426" y="1003987"/>
+            <a:ext cx="5916972" cy="5575394"/>
             <a:chOff x="0" y="0"/>
-            <a:chExt cx="5916973" cy="5575394"/>
+            <a:chExt cx="5916972" cy="5575394"/>
           </a:xfrm>
         </p:grpSpPr>
         <p:pic>
@@ -16048,7 +16048,7 @@
           <p:spPr bwMode="auto">
             <a:xfrm rot="0" flipH="0" flipV="0">
               <a:off x="125451" y="484875"/>
-              <a:ext cx="5761468" cy="5090519"/>
+              <a:ext cx="5761827" cy="5090519"/>
             </a:xfrm>
             <a:prstGeom prst="rect">
               <a:avLst/>
@@ -16542,7 +16542,7 @@
               </a:r>
               <a:endParaRPr sz="800">
                 <a:solidFill>
-                  <a:schemeClr val="bg1"/>
+                  <a:srgbClr val="9E3F19"/>
                 </a:solidFill>
                 <a:latin typeface="JetBrainsMono NF"/>
                 <a:cs typeface="JetBrainsMono NF"/>
@@ -17351,10 +17351,10 @@
           </p:nvGrpSpPr>
           <p:grpSpPr bwMode="auto">
             <a:xfrm>
-              <a:off x="188116" y="204786"/>
-              <a:ext cx="5251375" cy="228960"/>
+              <a:off x="188115" y="204786"/>
+              <a:ext cx="5251374" cy="228960"/>
               <a:chOff x="0" y="0"/>
-              <a:chExt cx="5251375" cy="228960"/>
+              <a:chExt cx="5251374" cy="228960"/>
             </a:xfrm>
           </p:grpSpPr>
           <p:sp>
@@ -17478,7 +17478,7 @@
       </p:grpSpPr>
       <p:pic>
         <p:nvPicPr>
-          <p:cNvPr id="1789384944" name="Google Shape;204;p18" descr="image.png"/>
+          <p:cNvPr id="52253321" name="Google Shape;204;p18" descr="image.png"/>
           <p:cNvPicPr/>
           <p:nvPr/>
         </p:nvPicPr>
@@ -17491,7 +17491,7 @@
         </p:blipFill>
         <p:spPr bwMode="auto">
           <a:xfrm>
-            <a:off x="-27494" y="-78556"/>
+            <a:off x="-27494" y="-78555"/>
             <a:ext cx="12191999" cy="6858000"/>
           </a:xfrm>
           <a:prstGeom prst="rect">
@@ -17505,7 +17505,7 @@
       </p:pic>
       <p:sp>
         <p:nvSpPr>
-          <p:cNvPr id="1628884390" name="Google Shape;178;p17"/>
+          <p:cNvPr id="1251454182" name="Google Shape;178;p17"/>
           <p:cNvSpPr txBox="1"/>
           <p:nvPr/>
         </p:nvSpPr>
@@ -17555,7 +17555,7 @@
       </p:sp>
       <p:pic>
         <p:nvPicPr>
-          <p:cNvPr id="773676469" name="Google Shape;180;p17" descr="image.png"/>
+          <p:cNvPr id="280807036" name="Google Shape;180;p17" descr="image.png"/>
           <p:cNvPicPr/>
           <p:nvPr/>
         </p:nvPicPr>
@@ -17582,7 +17582,7 @@
       </p:pic>
       <p:sp>
         <p:nvSpPr>
-          <p:cNvPr id="697329005" name=""/>
+          <p:cNvPr id="599035523" name=""/>
           <p:cNvSpPr txBox="1"/>
           <p:nvPr/>
         </p:nvSpPr>
@@ -17654,7 +17654,7 @@
       </p:sp>
       <p:sp>
         <p:nvSpPr>
-          <p:cNvPr id="179748154" name=""/>
+          <p:cNvPr id="524510910" name=""/>
           <p:cNvSpPr txBox="1"/>
           <p:nvPr/>
         </p:nvSpPr>
@@ -17859,7 +17859,7 @@
       </p:sp>
       <p:sp>
         <p:nvSpPr>
-          <p:cNvPr id="1779831000" name=""/>
+          <p:cNvPr id="1430918585" name=""/>
           <p:cNvSpPr txBox="1"/>
           <p:nvPr/>
         </p:nvSpPr>
@@ -17947,7 +17947,7 @@
       </p:sp>
       <p:sp>
         <p:nvSpPr>
-          <p:cNvPr id="981410310" name=""/>
+          <p:cNvPr id="946464629" name=""/>
           <p:cNvSpPr/>
           <p:nvPr/>
         </p:nvSpPr>
@@ -18016,7 +18016,7 @@
       </p:sp>
       <p:sp>
         <p:nvSpPr>
-          <p:cNvPr id="488948466" name=""/>
+          <p:cNvPr id="1708224043" name=""/>
           <p:cNvSpPr/>
           <p:nvPr/>
         </p:nvSpPr>
@@ -18085,7 +18085,7 @@
       </p:sp>
       <p:sp>
         <p:nvSpPr>
-          <p:cNvPr id="1594016199" name=""/>
+          <p:cNvPr id="1271968270" name=""/>
           <p:cNvSpPr txBox="1"/>
           <p:nvPr/>
         </p:nvSpPr>
@@ -18113,7 +18113,7 @@
       </p:sp>
       <p:sp>
         <p:nvSpPr>
-          <p:cNvPr id="270334154" name=""/>
+          <p:cNvPr id="1177948309" name=""/>
           <p:cNvSpPr txBox="1"/>
           <p:nvPr/>
         </p:nvSpPr>
@@ -18190,7 +18190,7 @@
       </p:sp>
       <p:sp>
         <p:nvSpPr>
-          <p:cNvPr id="1884105794" name=""/>
+          <p:cNvPr id="369329492" name=""/>
           <p:cNvSpPr txBox="1"/>
           <p:nvPr/>
         </p:nvSpPr>
@@ -18288,14 +18288,14 @@
       </p:sp>
       <p:sp>
         <p:nvSpPr>
-          <p:cNvPr id="408529867" name=""/>
+          <p:cNvPr id="762803492" name=""/>
           <p:cNvSpPr txBox="1"/>
           <p:nvPr/>
         </p:nvSpPr>
         <p:spPr bwMode="auto">
           <a:xfrm rot="0" flipH="0" flipV="0">
             <a:off x="706799" y="5996399"/>
-            <a:ext cx="5518233" cy="305159"/>
+            <a:ext cx="5518232" cy="305159"/>
           </a:xfrm>
           <a:prstGeom prst="rect">
             <a:avLst/>
@@ -18368,7 +18368,7 @@
       </p:grpSpPr>
       <p:pic>
         <p:nvPicPr>
-          <p:cNvPr id="11444913" name="Google Shape;244;p20" descr="image.png"/>
+          <p:cNvPr id="368343990" name="Google Shape;244;p20" descr="image.png"/>
           <p:cNvPicPr/>
           <p:nvPr/>
         </p:nvPicPr>
@@ -18395,7 +18395,7 @@
       </p:pic>
       <p:pic>
         <p:nvPicPr>
-          <p:cNvPr id="1079703346" name="Google Shape;245;p20" descr="image.png"/>
+          <p:cNvPr id="1832843969" name="Google Shape;245;p20" descr="image.png"/>
           <p:cNvPicPr/>
           <p:nvPr/>
         </p:nvPicPr>
@@ -18422,7 +18422,7 @@
       </p:pic>
       <p:pic>
         <p:nvPicPr>
-          <p:cNvPr id="1455688191" name="Google Shape;246;p20" descr="image.png"/>
+          <p:cNvPr id="359800217" name="Google Shape;246;p20" descr="image.png"/>
           <p:cNvPicPr/>
           <p:nvPr/>
         </p:nvPicPr>
@@ -18449,7 +18449,7 @@
       </p:pic>
       <p:pic>
         <p:nvPicPr>
-          <p:cNvPr id="749300373" name="Google Shape;247;p20" descr="image.png"/>
+          <p:cNvPr id="406616571" name="Google Shape;247;p20" descr="image.png"/>
           <p:cNvPicPr/>
           <p:nvPr/>
         </p:nvPicPr>
@@ -18476,7 +18476,7 @@
       </p:pic>
       <p:sp>
         <p:nvSpPr>
-          <p:cNvPr id="409271895" name="Google Shape;248;p20"/>
+          <p:cNvPr id="1619457593" name="Google Shape;248;p20"/>
           <p:cNvSpPr txBox="1"/>
           <p:nvPr/>
         </p:nvSpPr>
@@ -18526,7 +18526,7 @@
       </p:sp>
       <p:pic>
         <p:nvPicPr>
-          <p:cNvPr id="392855844" name="Google Shape;250;p20" descr="image.png"/>
+          <p:cNvPr id="22510204" name="Google Shape;250;p20" descr="image.png"/>
           <p:cNvPicPr/>
           <p:nvPr/>
         </p:nvPicPr>
@@ -18553,7 +18553,7 @@
       </p:pic>
       <p:sp>
         <p:nvSpPr>
-          <p:cNvPr id="277833970" name="Google Shape;251;p20"/>
+          <p:cNvPr id="389517971" name="Google Shape;251;p20"/>
           <p:cNvSpPr txBox="1"/>
           <p:nvPr/>
         </p:nvSpPr>
@@ -18614,7 +18614,7 @@
       </p:sp>
       <p:sp>
         <p:nvSpPr>
-          <p:cNvPr id="1451724251" name="Google Shape;253;p20"/>
+          <p:cNvPr id="330070758" name="Google Shape;253;p20"/>
           <p:cNvSpPr txBox="1"/>
           <p:nvPr/>
         </p:nvSpPr>
@@ -18667,7 +18667,7 @@
       </p:sp>
       <p:sp>
         <p:nvSpPr>
-          <p:cNvPr id="42273723" name="Google Shape;254;p20"/>
+          <p:cNvPr id="1149798505" name="Google Shape;254;p20"/>
           <p:cNvSpPr txBox="1"/>
           <p:nvPr/>
         </p:nvSpPr>
@@ -18717,7 +18717,7 @@
       </p:sp>
       <p:sp>
         <p:nvSpPr>
-          <p:cNvPr id="411127991" name="Google Shape;256;p20"/>
+          <p:cNvPr id="1037369072" name="Google Shape;256;p20"/>
           <p:cNvSpPr txBox="1"/>
           <p:nvPr/>
         </p:nvSpPr>
@@ -18848,14 +18848,14 @@
       </p:sp>
       <p:sp>
         <p:nvSpPr>
-          <p:cNvPr id="1509278453" name="Google Shape;257;p20"/>
+          <p:cNvPr id="510897220" name="Google Shape;257;p20"/>
           <p:cNvSpPr txBox="1"/>
           <p:nvPr/>
         </p:nvSpPr>
         <p:spPr bwMode="auto">
           <a:xfrm>
-            <a:off x="8362949" y="3005136"/>
-            <a:ext cx="3286890" cy="228960"/>
+            <a:off x="8362947" y="3005136"/>
+            <a:ext cx="3295530" cy="228960"/>
           </a:xfrm>
           <a:prstGeom prst="rect">
             <a:avLst/>
@@ -18890,7 +18890,7 @@
                 <a:ea typeface="Poppins SemiBold"/>
                 <a:cs typeface="Poppins SemiBold"/>
               </a:rPr>
-              <a:t>ELECTRUM ALGORITHM</a:t>
+              <a:t>Electrum Algorithm</a:t>
             </a:r>
             <a:endParaRPr/>
           </a:p>
@@ -18898,7 +18898,7 @@
       </p:sp>
       <p:sp>
         <p:nvSpPr>
-          <p:cNvPr id="766228971" name="Google Shape;259;p20"/>
+          <p:cNvPr id="928672342" name="Google Shape;259;p20"/>
           <p:cNvSpPr txBox="1"/>
           <p:nvPr/>
         </p:nvSpPr>
@@ -19025,7 +19025,7 @@
       </p:sp>
       <p:sp>
         <p:nvSpPr>
-          <p:cNvPr id="312355518" name=""/>
+          <p:cNvPr id="263435423" name=""/>
           <p:cNvSpPr/>
           <p:nvPr/>
         </p:nvSpPr>
@@ -19095,7 +19095,7 @@
       </p:sp>
       <p:sp>
         <p:nvSpPr>
-          <p:cNvPr id="440307341" name=""/>
+          <p:cNvPr id="657073760" name=""/>
           <p:cNvSpPr/>
           <p:nvPr/>
         </p:nvSpPr>
@@ -19165,7 +19165,7 @@
       </p:sp>
       <p:sp>
         <p:nvSpPr>
-          <p:cNvPr id="826793167" name=""/>
+          <p:cNvPr id="1135597785" name=""/>
           <p:cNvSpPr/>
           <p:nvPr/>
         </p:nvSpPr>
@@ -19275,7 +19275,7 @@
       </p:grpSpPr>
       <p:pic>
         <p:nvPicPr>
-          <p:cNvPr id="115280520" name="Google Shape;264;p21" descr="image.png"/>
+          <p:cNvPr id="898300156" name="Google Shape;264;p21" descr="image.png"/>
           <p:cNvPicPr/>
           <p:nvPr/>
         </p:nvPicPr>
@@ -19302,14 +19302,14 @@
       </p:pic>
       <p:sp>
         <p:nvSpPr>
-          <p:cNvPr id="1385044662" name="Google Shape;266;p21"/>
+          <p:cNvPr id="566957573" name="Google Shape;266;p21"/>
           <p:cNvSpPr txBox="1"/>
           <p:nvPr/>
         </p:nvSpPr>
         <p:spPr bwMode="auto">
           <a:xfrm>
-            <a:off x="819150" y="466725"/>
-            <a:ext cx="11372850" cy="485775"/>
+            <a:off x="819149" y="517282"/>
+            <a:ext cx="11377169" cy="388979"/>
           </a:xfrm>
           <a:prstGeom prst="rect">
             <a:avLst/>
@@ -19336,7 +19336,7 @@
               <a:defRPr/>
             </a:pPr>
             <a:r>
-              <a:rPr lang="en-US" sz="2550" b="1" i="0" u="none" strike="noStrike" cap="none">
+              <a:rPr lang="it-IT" sz="2550" b="1" i="0" u="none" strike="noStrike" cap="none">
                 <a:solidFill>
                   <a:srgbClr val="FFFFFF"/>
                 </a:solidFill>
@@ -19344,57 +19344,18 @@
                 <a:ea typeface="Poppins"/>
                 <a:cs typeface="Poppins"/>
               </a:rPr>
-              <a:t>Persistenza del Wallet su Disco</a:t>
-            </a:r>
-            <a:endParaRPr/>
-          </a:p>
-        </p:txBody>
-      </p:sp>
-      <p:sp>
-        <p:nvSpPr>
-          <p:cNvPr id="1251730849" name="Google Shape;267;p21"/>
-          <p:cNvSpPr txBox="1"/>
-          <p:nvPr/>
-        </p:nvSpPr>
-        <p:spPr bwMode="auto">
-          <a:xfrm>
-            <a:off x="10229850" y="6515100"/>
-            <a:ext cx="1495425" cy="142875"/>
-          </a:xfrm>
-          <a:prstGeom prst="rect">
-            <a:avLst/>
-          </a:prstGeom>
-          <a:noFill/>
-          <a:ln>
-            <a:noFill/>
-          </a:ln>
-        </p:spPr>
-        <p:txBody>
-          <a:bodyPr spcFirstLastPara="1" wrap="square" lIns="0" tIns="0" rIns="0" bIns="0" anchor="t" anchorCtr="0">
-            <a:spAutoFit/>
-          </a:bodyPr>
-          <a:lstStyle/>
-          <a:p>
-            <a:pPr marL="0" marR="0" lvl="0" indent="0" algn="l" rtl="0">
-              <a:spcBef>
-                <a:spcPts val="0"/>
-              </a:spcBef>
-              <a:spcAft>
-                <a:spcPts val="0"/>
-              </a:spcAft>
-              <a:buNone/>
-              <a:defRPr/>
-            </a:pPr>
-            <a:r>
-              <a:rPr lang="en-US" sz="900" b="0" i="0" u="none" strike="noStrike" cap="none">
-                <a:solidFill>
-                  <a:srgbClr val="64748B"/>
-                </a:solidFill>
-                <a:latin typeface="Inter"/>
-                <a:ea typeface="Inter"/>
-                <a:cs typeface="Inter"/>
-              </a:rPr>
-              <a:t>Fase 3: Storage &amp; Recupero</a:t>
+              <a:t>Salvataggio </a:t>
+            </a:r>
+            <a:r>
+              <a:rPr lang="en-US" sz="2550" b="1" i="0" u="none" strike="noStrike" cap="none">
+                <a:solidFill>
+                  <a:srgbClr val="FFFFFF"/>
+                </a:solidFill>
+                <a:latin typeface="Poppins"/>
+                <a:ea typeface="Poppins"/>
+                <a:cs typeface="Poppins"/>
+              </a:rPr>
+              <a:t>Wallet su Disco</a:t>
             </a:r>
             <a:endParaRPr/>
           </a:p>
@@ -19402,7 +19363,7 @@
       </p:sp>
       <p:pic>
         <p:nvPicPr>
-          <p:cNvPr id="1051390812" name="Google Shape;268;p21" descr="image.png"/>
+          <p:cNvPr id="942062378" name="Google Shape;268;p21" descr="image.png"/>
           <p:cNvPicPr/>
           <p:nvPr/>
         </p:nvPicPr>
@@ -19427,6 +19388,1122 @@
           </a:ln>
         </p:spPr>
       </p:pic>
+      <p:sp>
+        <p:nvSpPr>
+          <p:cNvPr id="23658837" name=""/>
+          <p:cNvSpPr txBox="1"/>
+          <p:nvPr/>
+        </p:nvSpPr>
+        <p:spPr bwMode="auto">
+          <a:xfrm rot="0" flipH="0" flipV="0">
+            <a:off x="7157092" y="1196162"/>
+            <a:ext cx="4588792" cy="4663799"/>
+          </a:xfrm>
+          <a:prstGeom prst="rect">
+            <a:avLst/>
+          </a:prstGeom>
+          <a:noFill/>
+        </p:spPr>
+        <p:txBody>
+          <a:bodyPr vertOverflow="overflow" horzOverflow="overflow" vert="horz" wrap="square" lIns="91440" tIns="45720" rIns="91440" bIns="45720" numCol="1" spcCol="0" rtlCol="0" fromWordArt="0" anchor="t" anchorCtr="0" forceAA="0" upright="0" compatLnSpc="0">
+            <a:spAutoFit/>
+          </a:bodyPr>
+          <a:p>
+            <a:pPr>
+              <a:defRPr/>
+            </a:pPr>
+            <a:r>
+              <a:rPr lang="it-IT" sz="1200" b="0" i="0" u="none" strike="noStrike" cap="none" spc="0">
+                <a:solidFill>
+                  <a:srgbClr val="9E3F19"/>
+                </a:solidFill>
+                <a:latin typeface="JetBrainsMono NF"/>
+                <a:ea typeface="JetBrainsMono NF"/>
+                <a:cs typeface="JetBrainsMono NF"/>
+              </a:rPr>
+              <a:t>type </a:t>
+            </a:r>
+            <a:r>
+              <a:rPr lang="it-IT" sz="1200" b="0" i="0" u="none" strike="noStrike" cap="none" spc="0">
+                <a:solidFill>
+                  <a:schemeClr val="bg1"/>
+                </a:solidFill>
+                <a:latin typeface="JetBrainsMono NF"/>
+                <a:ea typeface="JetBrainsMono NF"/>
+                <a:cs typeface="JetBrainsMono NF"/>
+              </a:rPr>
+              <a:t>CryptoEnvelope </a:t>
+            </a:r>
+            <a:r>
+              <a:rPr lang="it-IT" sz="1200" b="0" i="0" u="none" strike="noStrike" cap="none" spc="0">
+                <a:solidFill>
+                  <a:srgbClr val="9E3F19"/>
+                </a:solidFill>
+                <a:latin typeface="JetBrainsMono NF"/>
+                <a:ea typeface="JetBrainsMono NF"/>
+                <a:cs typeface="JetBrainsMono NF"/>
+              </a:rPr>
+              <a:t>struct </a:t>
+            </a:r>
+            <a:r>
+              <a:rPr lang="it-IT" sz="1200" b="0" i="0" u="none" strike="noStrike" cap="none" spc="0">
+                <a:solidFill>
+                  <a:schemeClr val="bg1"/>
+                </a:solidFill>
+                <a:latin typeface="JetBrainsMono NF"/>
+                <a:ea typeface="JetBrainsMono NF"/>
+                <a:cs typeface="JetBrainsMono NF"/>
+              </a:rPr>
+              <a:t>{</a:t>
+            </a:r>
+            <a:endParaRPr sz="1200" b="0" i="0" u="none" strike="noStrike" cap="none" spc="0">
+              <a:solidFill>
+                <a:schemeClr val="bg1"/>
+              </a:solidFill>
+              <a:latin typeface="JetBrainsMono NF"/>
+              <a:cs typeface="JetBrainsMono NF"/>
+            </a:endParaRPr>
+          </a:p>
+          <a:p>
+            <a:pPr>
+              <a:defRPr/>
+            </a:pPr>
+            <a:r>
+              <a:rPr lang="it-IT" sz="1200" b="0" i="0" u="none" strike="noStrike" cap="none" spc="0">
+                <a:solidFill>
+                  <a:schemeClr val="bg1"/>
+                </a:solidFill>
+                <a:latin typeface="JetBrainsMono NF"/>
+                <a:ea typeface="JetBrainsMono NF"/>
+                <a:cs typeface="JetBrainsMono NF"/>
+              </a:rPr>
+              <a:t>    </a:t>
+            </a:r>
+            <a:r>
+              <a:rPr lang="it-IT" sz="1200" b="0" i="0" u="none" strike="noStrike" cap="none" spc="0">
+                <a:solidFill>
+                  <a:srgbClr val="33ABE1"/>
+                </a:solidFill>
+                <a:latin typeface="JetBrainsMono NF"/>
+                <a:ea typeface="JetBrainsMono NF"/>
+                <a:cs typeface="JetBrainsMono NF"/>
+              </a:rPr>
+              <a:t>Cipher     </a:t>
+            </a:r>
+            <a:r>
+              <a:rPr lang="it-IT" sz="1200" b="0" i="0" u="none" strike="noStrike" cap="none" spc="0">
+                <a:solidFill>
+                  <a:schemeClr val="bg1"/>
+                </a:solidFill>
+                <a:latin typeface="JetBrainsMono NF"/>
+                <a:ea typeface="JetBrainsMono NF"/>
+                <a:cs typeface="JetBrainsMono NF"/>
+              </a:rPr>
+              <a:t>string   </a:t>
+            </a:r>
+            <a:endParaRPr sz="1200" b="0" i="0" u="none" strike="noStrike" cap="none" spc="0">
+              <a:solidFill>
+                <a:schemeClr val="bg1"/>
+              </a:solidFill>
+              <a:latin typeface="JetBrainsMono NF"/>
+              <a:cs typeface="JetBrainsMono NF"/>
+            </a:endParaRPr>
+          </a:p>
+          <a:p>
+            <a:pPr>
+              <a:defRPr/>
+            </a:pPr>
+            <a:r>
+              <a:rPr lang="it-IT" sz="1200" b="0" i="0" u="none" strike="noStrike" cap="none" spc="0">
+                <a:solidFill>
+                  <a:schemeClr val="bg1"/>
+                </a:solidFill>
+                <a:latin typeface="JetBrainsMono NF"/>
+                <a:ea typeface="JetBrainsMono NF"/>
+                <a:cs typeface="JetBrainsMono NF"/>
+              </a:rPr>
+              <a:t>    </a:t>
+            </a:r>
+            <a:r>
+              <a:rPr lang="it-IT" sz="1200" b="0" i="0" u="none" strike="noStrike" cap="none" spc="0">
+                <a:solidFill>
+                  <a:srgbClr val="33ABE1"/>
+                </a:solidFill>
+                <a:latin typeface="JetBrainsMono NF"/>
+                <a:ea typeface="JetBrainsMono NF"/>
+                <a:cs typeface="JetBrainsMono NF"/>
+              </a:rPr>
+              <a:t>Ciphertext </a:t>
+            </a:r>
+            <a:r>
+              <a:rPr lang="it-IT" sz="1200" b="0" i="0" u="none" strike="noStrike" cap="none" spc="0">
+                <a:solidFill>
+                  <a:schemeClr val="bg1"/>
+                </a:solidFill>
+                <a:latin typeface="JetBrainsMono NF"/>
+                <a:ea typeface="JetBrainsMono NF"/>
+                <a:cs typeface="JetBrainsMono NF"/>
+              </a:rPr>
+              <a:t>[]byte    </a:t>
+            </a:r>
+            <a:endParaRPr sz="1200" b="0" i="0" u="none" strike="noStrike" cap="none" spc="0">
+              <a:solidFill>
+                <a:schemeClr val="bg1"/>
+              </a:solidFill>
+              <a:latin typeface="JetBrainsMono NF"/>
+              <a:cs typeface="JetBrainsMono NF"/>
+            </a:endParaRPr>
+          </a:p>
+          <a:p>
+            <a:pPr>
+              <a:defRPr/>
+            </a:pPr>
+            <a:r>
+              <a:rPr lang="it-IT" sz="1200" b="0" i="0" u="none" strike="noStrike" cap="none" spc="0">
+                <a:solidFill>
+                  <a:schemeClr val="bg1"/>
+                </a:solidFill>
+                <a:latin typeface="JetBrainsMono NF"/>
+                <a:ea typeface="JetBrainsMono NF"/>
+                <a:cs typeface="JetBrainsMono NF"/>
+              </a:rPr>
+              <a:t>    </a:t>
+            </a:r>
+            <a:r>
+              <a:rPr lang="it-IT" sz="1200" b="0" i="0" u="none" strike="noStrike" cap="none" spc="0">
+                <a:solidFill>
+                  <a:srgbClr val="33ABE1"/>
+                </a:solidFill>
+                <a:latin typeface="JetBrainsMono NF"/>
+                <a:ea typeface="JetBrainsMono NF"/>
+                <a:cs typeface="JetBrainsMono NF"/>
+              </a:rPr>
+              <a:t>Nonce      </a:t>
+            </a:r>
+            <a:r>
+              <a:rPr lang="it-IT" sz="1200" b="0" i="0" u="none" strike="noStrike" cap="none" spc="0">
+                <a:solidFill>
+                  <a:schemeClr val="bg1"/>
+                </a:solidFill>
+                <a:latin typeface="JetBrainsMono NF"/>
+                <a:ea typeface="JetBrainsMono NF"/>
+                <a:cs typeface="JetBrainsMono NF"/>
+              </a:rPr>
+              <a:t>[]byte    </a:t>
+            </a:r>
+            <a:endParaRPr sz="1200" b="0" i="0" u="none" strike="noStrike" cap="none" spc="0">
+              <a:solidFill>
+                <a:schemeClr val="bg1"/>
+              </a:solidFill>
+              <a:latin typeface="JetBrainsMono NF"/>
+              <a:cs typeface="JetBrainsMono NF"/>
+            </a:endParaRPr>
+          </a:p>
+          <a:p>
+            <a:pPr>
+              <a:defRPr/>
+            </a:pPr>
+            <a:r>
+              <a:rPr lang="it-IT" sz="1200" b="0" i="0" u="none" strike="noStrike" cap="none" spc="0">
+                <a:solidFill>
+                  <a:schemeClr val="bg1"/>
+                </a:solidFill>
+                <a:latin typeface="JetBrainsMono NF"/>
+                <a:ea typeface="JetBrainsMono NF"/>
+                <a:cs typeface="JetBrainsMono NF"/>
+              </a:rPr>
+              <a:t>    </a:t>
+            </a:r>
+            <a:r>
+              <a:rPr lang="it-IT" sz="1200" b="0" i="0" u="none" strike="noStrike" cap="none" spc="0">
+                <a:solidFill>
+                  <a:srgbClr val="33ABE1"/>
+                </a:solidFill>
+                <a:latin typeface="JetBrainsMono NF"/>
+                <a:ea typeface="JetBrainsMono NF"/>
+                <a:cs typeface="JetBrainsMono NF"/>
+              </a:rPr>
+              <a:t>KDF        </a:t>
+            </a:r>
+            <a:r>
+              <a:rPr lang="it-IT" sz="1200" b="0" i="0" u="none" strike="noStrike" cap="none" spc="0">
+                <a:solidFill>
+                  <a:schemeClr val="bg1"/>
+                </a:solidFill>
+                <a:latin typeface="JetBrainsMono NF"/>
+                <a:ea typeface="JetBrainsMono NF"/>
+                <a:cs typeface="JetBrainsMono NF"/>
+              </a:rPr>
+              <a:t>string    </a:t>
+            </a:r>
+            <a:endParaRPr lang="it-IT" sz="1200" b="0" i="0" u="none" strike="noStrike" cap="none" spc="0">
+              <a:solidFill>
+                <a:schemeClr val="bg1"/>
+              </a:solidFill>
+              <a:latin typeface="JetBrainsMono NF"/>
+              <a:ea typeface="JetBrainsMono NF"/>
+              <a:cs typeface="JetBrainsMono NF"/>
+            </a:endParaRPr>
+          </a:p>
+          <a:p>
+            <a:pPr>
+              <a:defRPr/>
+            </a:pPr>
+            <a:r>
+              <a:rPr lang="it-IT" sz="1200" b="0" i="0" u="none" strike="noStrike" cap="none" spc="0">
+                <a:solidFill>
+                  <a:schemeClr val="bg1"/>
+                </a:solidFill>
+                <a:latin typeface="JetBrainsMono NF"/>
+                <a:ea typeface="JetBrainsMono NF"/>
+                <a:cs typeface="JetBrainsMono NF"/>
+              </a:rPr>
+              <a:t>    </a:t>
+            </a:r>
+            <a:r>
+              <a:rPr lang="it-IT" sz="1200" b="0" i="0" u="none" strike="noStrike" cap="none" spc="0">
+                <a:solidFill>
+                  <a:srgbClr val="33ABE1"/>
+                </a:solidFill>
+                <a:latin typeface="JetBrainsMono NF"/>
+                <a:ea typeface="JetBrainsMono NF"/>
+                <a:cs typeface="JetBrainsMono NF"/>
+              </a:rPr>
+              <a:t>KDFParams  </a:t>
+            </a:r>
+            <a:r>
+              <a:rPr lang="it-IT" sz="1200" b="0" i="0" u="none" strike="noStrike" cap="none" spc="0">
+                <a:solidFill>
+                  <a:schemeClr val="bg1"/>
+                </a:solidFill>
+                <a:latin typeface="JetBrainsMono NF"/>
+                <a:ea typeface="JetBrainsMono NF"/>
+                <a:cs typeface="JetBrainsMono NF"/>
+              </a:rPr>
+              <a:t>KDFParams</a:t>
+            </a:r>
+            <a:endParaRPr sz="1200" b="0" i="0" u="none" strike="noStrike" cap="none" spc="0">
+              <a:solidFill>
+                <a:schemeClr val="bg1"/>
+              </a:solidFill>
+              <a:latin typeface="JetBrainsMono NF"/>
+              <a:cs typeface="JetBrainsMono NF"/>
+            </a:endParaRPr>
+          </a:p>
+          <a:p>
+            <a:pPr>
+              <a:defRPr/>
+            </a:pPr>
+            <a:r>
+              <a:rPr lang="it-IT" sz="1200" b="0" i="0" u="none" strike="noStrike" cap="none" spc="0">
+                <a:solidFill>
+                  <a:schemeClr val="bg1"/>
+                </a:solidFill>
+                <a:latin typeface="JetBrainsMono NF"/>
+                <a:ea typeface="JetBrainsMono NF"/>
+                <a:cs typeface="JetBrainsMono NF"/>
+              </a:rPr>
+              <a:t>}</a:t>
+            </a:r>
+            <a:endParaRPr lang="it-IT" sz="1200" b="0" i="0" u="none" strike="noStrike" cap="none" spc="0">
+              <a:solidFill>
+                <a:schemeClr val="bg1"/>
+              </a:solidFill>
+              <a:latin typeface="JetBrainsMono NF"/>
+              <a:ea typeface="JetBrainsMono NF"/>
+              <a:cs typeface="JetBrainsMono NF"/>
+            </a:endParaRPr>
+          </a:p>
+          <a:p>
+            <a:pPr>
+              <a:defRPr/>
+            </a:pPr>
+            <a:endParaRPr sz="1200">
+              <a:solidFill>
+                <a:schemeClr val="bg1"/>
+              </a:solidFill>
+              <a:latin typeface="JetBrainsMono NF"/>
+              <a:cs typeface="JetBrainsMono NF"/>
+            </a:endParaRPr>
+          </a:p>
+          <a:p>
+            <a:pPr>
+              <a:defRPr/>
+            </a:pPr>
+            <a:r>
+              <a:rPr lang="it-IT" sz="1200" b="0" i="0" u="none" strike="noStrike" cap="none" spc="0">
+                <a:solidFill>
+                  <a:srgbClr val="9E3F19"/>
+                </a:solidFill>
+                <a:latin typeface="JetBrainsMono NF"/>
+                <a:ea typeface="JetBrainsMono NF"/>
+                <a:cs typeface="JetBrainsMono NF"/>
+              </a:rPr>
+              <a:t>type </a:t>
+            </a:r>
+            <a:r>
+              <a:rPr lang="it-IT" sz="1200" b="0" i="0" u="none" strike="noStrike" cap="none" spc="0">
+                <a:solidFill>
+                  <a:schemeClr val="bg1"/>
+                </a:solidFill>
+                <a:latin typeface="JetBrainsMono NF"/>
+                <a:ea typeface="JetBrainsMono NF"/>
+                <a:cs typeface="JetBrainsMono NF"/>
+              </a:rPr>
+              <a:t>KeystoreData </a:t>
+            </a:r>
+            <a:r>
+              <a:rPr lang="it-IT" sz="1200" b="0" i="0" u="none" strike="noStrike" cap="none" spc="0">
+                <a:solidFill>
+                  <a:srgbClr val="9E3F19"/>
+                </a:solidFill>
+                <a:latin typeface="JetBrainsMono NF"/>
+                <a:ea typeface="JetBrainsMono NF"/>
+                <a:cs typeface="JetBrainsMono NF"/>
+              </a:rPr>
+              <a:t>struct </a:t>
+            </a:r>
+            <a:r>
+              <a:rPr lang="it-IT" sz="1200" b="0" i="0" u="none" strike="noStrike" cap="none" spc="0">
+                <a:solidFill>
+                  <a:schemeClr val="bg1"/>
+                </a:solidFill>
+                <a:latin typeface="JetBrainsMono NF"/>
+                <a:ea typeface="JetBrainsMono NF"/>
+                <a:cs typeface="JetBrainsMono NF"/>
+              </a:rPr>
+              <a:t>{</a:t>
+            </a:r>
+            <a:endParaRPr lang="it-IT" sz="1200" b="0" i="0" u="none" strike="noStrike" cap="none" spc="0">
+              <a:solidFill>
+                <a:schemeClr val="bg1"/>
+              </a:solidFill>
+              <a:latin typeface="JetBrainsMono NF"/>
+              <a:cs typeface="JetBrainsMono NF"/>
+            </a:endParaRPr>
+          </a:p>
+          <a:p>
+            <a:pPr>
+              <a:defRPr/>
+            </a:pPr>
+            <a:r>
+              <a:rPr lang="it-IT" sz="1200" b="0" i="0" u="none" strike="noStrike" cap="none" spc="0">
+                <a:solidFill>
+                  <a:schemeClr val="bg1"/>
+                </a:solidFill>
+                <a:latin typeface="JetBrainsMono NF"/>
+                <a:ea typeface="JetBrainsMono NF"/>
+                <a:cs typeface="JetBrainsMono NF"/>
+              </a:rPr>
+              <a:t>    </a:t>
+            </a:r>
+            <a:r>
+              <a:rPr lang="it-IT" sz="1200" b="0" i="0" u="none" strike="noStrike" cap="none" spc="0">
+                <a:solidFill>
+                  <a:srgbClr val="33ABE1"/>
+                </a:solidFill>
+                <a:latin typeface="JetBrainsMono NF"/>
+                <a:ea typeface="JetBrainsMono NF"/>
+                <a:cs typeface="JetBrainsMono NF"/>
+              </a:rPr>
+              <a:t>Mnemonic </a:t>
+            </a:r>
+            <a:r>
+              <a:rPr lang="it-IT" sz="1200" b="0" i="0" u="none" strike="noStrike" cap="none" spc="0">
+                <a:solidFill>
+                  <a:schemeClr val="bg1"/>
+                </a:solidFill>
+                <a:latin typeface="JetBrainsMono NF"/>
+                <a:ea typeface="JetBrainsMono NF"/>
+                <a:cs typeface="JetBrainsMono NF"/>
+              </a:rPr>
+              <a:t>[</a:t>
+            </a:r>
+            <a:r>
+              <a:rPr lang="it-IT" sz="1200" b="0" i="0" u="none" strike="noStrike" cap="none" spc="0">
+                <a:solidFill>
+                  <a:srgbClr val="33ABE1"/>
+                </a:solidFill>
+                <a:latin typeface="JetBrainsMono NF"/>
+                <a:ea typeface="JetBrainsMono NF"/>
+                <a:cs typeface="JetBrainsMono NF"/>
+              </a:rPr>
+              <a:t>12</a:t>
+            </a:r>
+            <a:r>
+              <a:rPr lang="it-IT" sz="1200" b="0" i="0" u="none" strike="noStrike" cap="none" spc="0">
+                <a:solidFill>
+                  <a:schemeClr val="bg1"/>
+                </a:solidFill>
+                <a:latin typeface="JetBrainsMono NF"/>
+                <a:ea typeface="JetBrainsMono NF"/>
+                <a:cs typeface="JetBrainsMono NF"/>
+              </a:rPr>
+              <a:t>]string</a:t>
+            </a:r>
+            <a:endParaRPr lang="it-IT" sz="1200" b="0" i="0" u="none" strike="noStrike" cap="none" spc="0">
+              <a:solidFill>
+                <a:schemeClr val="bg1"/>
+              </a:solidFill>
+              <a:latin typeface="JetBrainsMono NF"/>
+              <a:cs typeface="JetBrainsMono NF"/>
+            </a:endParaRPr>
+          </a:p>
+          <a:p>
+            <a:pPr>
+              <a:defRPr/>
+            </a:pPr>
+            <a:r>
+              <a:rPr lang="it-IT" sz="1200" b="0" i="0" u="none" strike="noStrike" cap="none" spc="0">
+                <a:solidFill>
+                  <a:schemeClr val="bg1"/>
+                </a:solidFill>
+                <a:latin typeface="JetBrainsMono NF"/>
+                <a:ea typeface="JetBrainsMono NF"/>
+                <a:cs typeface="JetBrainsMono NF"/>
+              </a:rPr>
+              <a:t>    </a:t>
+            </a:r>
+            <a:r>
+              <a:rPr lang="it-IT" sz="1200" b="0" i="0" u="none" strike="noStrike" cap="none" spc="0">
+                <a:solidFill>
+                  <a:srgbClr val="33ABE1"/>
+                </a:solidFill>
+                <a:latin typeface="JetBrainsMono NF"/>
+                <a:ea typeface="JetBrainsMono NF"/>
+                <a:cs typeface="JetBrainsMono NF"/>
+              </a:rPr>
+              <a:t>Seed     </a:t>
+            </a:r>
+            <a:r>
+              <a:rPr lang="it-IT" sz="1200" b="0" i="0" u="none" strike="noStrike" cap="none" spc="0">
+                <a:solidFill>
+                  <a:schemeClr val="bg1"/>
+                </a:solidFill>
+                <a:latin typeface="JetBrainsMono NF"/>
+                <a:ea typeface="JetBrainsMono NF"/>
+                <a:cs typeface="JetBrainsMono NF"/>
+              </a:rPr>
+              <a:t>[</a:t>
+            </a:r>
+            <a:r>
+              <a:rPr lang="it-IT" sz="1200" b="0" i="0" u="none" strike="noStrike" cap="none" spc="0">
+                <a:solidFill>
+                  <a:srgbClr val="33ABE1"/>
+                </a:solidFill>
+                <a:latin typeface="JetBrainsMono NF"/>
+                <a:ea typeface="JetBrainsMono NF"/>
+                <a:cs typeface="JetBrainsMono NF"/>
+              </a:rPr>
+              <a:t>64</a:t>
+            </a:r>
+            <a:r>
+              <a:rPr lang="it-IT" sz="1200" b="0" i="0" u="none" strike="noStrike" cap="none" spc="0">
+                <a:solidFill>
+                  <a:schemeClr val="bg1"/>
+                </a:solidFill>
+                <a:latin typeface="JetBrainsMono NF"/>
+                <a:ea typeface="JetBrainsMono NF"/>
+                <a:cs typeface="JetBrainsMono NF"/>
+              </a:rPr>
+              <a:t>]byte   </a:t>
+            </a:r>
+            <a:endParaRPr lang="it-IT" sz="1200" b="0" i="0" u="none" strike="noStrike" cap="none" spc="0">
+              <a:solidFill>
+                <a:schemeClr val="bg1"/>
+              </a:solidFill>
+              <a:latin typeface="JetBrainsMono NF"/>
+              <a:cs typeface="JetBrainsMono NF"/>
+            </a:endParaRPr>
+          </a:p>
+          <a:p>
+            <a:pPr>
+              <a:defRPr/>
+            </a:pPr>
+            <a:r>
+              <a:rPr lang="it-IT" sz="1200" b="0" i="0" u="none" strike="noStrike" cap="none" spc="0">
+                <a:solidFill>
+                  <a:schemeClr val="bg1"/>
+                </a:solidFill>
+                <a:latin typeface="JetBrainsMono NF"/>
+                <a:ea typeface="JetBrainsMono NF"/>
+                <a:cs typeface="JetBrainsMono NF"/>
+              </a:rPr>
+              <a:t>    </a:t>
+            </a:r>
+            <a:r>
+              <a:rPr lang="it-IT" sz="1200" b="0" i="0" u="none" strike="noStrike" cap="none" spc="0">
+                <a:solidFill>
+                  <a:srgbClr val="33ABE1"/>
+                </a:solidFill>
+                <a:latin typeface="JetBrainsMono NF"/>
+                <a:ea typeface="JetBrainsMono NF"/>
+                <a:cs typeface="JetBrainsMono NF"/>
+              </a:rPr>
+              <a:t>Xpub     </a:t>
+            </a:r>
+            <a:r>
+              <a:rPr lang="it-IT" sz="1200" b="0" i="0" u="none" strike="noStrike" cap="none" spc="0">
+                <a:solidFill>
+                  <a:schemeClr val="bg1"/>
+                </a:solidFill>
+                <a:latin typeface="JetBrainsMono NF"/>
+                <a:ea typeface="JetBrainsMono NF"/>
+                <a:cs typeface="JetBrainsMono NF"/>
+              </a:rPr>
+              <a:t>[]byte     </a:t>
+            </a:r>
+            <a:endParaRPr lang="it-IT" sz="1200" b="0" i="0" u="none" strike="noStrike" cap="none" spc="0">
+              <a:solidFill>
+                <a:schemeClr val="bg1"/>
+              </a:solidFill>
+              <a:latin typeface="JetBrainsMono NF"/>
+              <a:cs typeface="JetBrainsMono NF"/>
+            </a:endParaRPr>
+          </a:p>
+          <a:p>
+            <a:pPr>
+              <a:defRPr/>
+            </a:pPr>
+            <a:r>
+              <a:rPr lang="it-IT" sz="1200" b="0" i="0" u="none" strike="noStrike" cap="none" spc="0">
+                <a:solidFill>
+                  <a:schemeClr val="bg1"/>
+                </a:solidFill>
+                <a:latin typeface="JetBrainsMono NF"/>
+                <a:ea typeface="JetBrainsMono NF"/>
+                <a:cs typeface="JetBrainsMono NF"/>
+              </a:rPr>
+              <a:t>    </a:t>
+            </a:r>
+            <a:r>
+              <a:rPr lang="it-IT" sz="1200" b="0" i="0" u="none" strike="noStrike" cap="none" spc="0">
+                <a:solidFill>
+                  <a:srgbClr val="33ABE1"/>
+                </a:solidFill>
+                <a:latin typeface="JetBrainsMono NF"/>
+                <a:ea typeface="JetBrainsMono NF"/>
+                <a:cs typeface="JetBrainsMono NF"/>
+              </a:rPr>
+              <a:t>Xprv     </a:t>
+            </a:r>
+            <a:r>
+              <a:rPr lang="it-IT" sz="1200" b="0" i="0" u="none" strike="noStrike" cap="none" spc="0">
+                <a:solidFill>
+                  <a:schemeClr val="bg1"/>
+                </a:solidFill>
+                <a:latin typeface="JetBrainsMono NF"/>
+                <a:ea typeface="JetBrainsMono NF"/>
+                <a:cs typeface="JetBrainsMono NF"/>
+              </a:rPr>
+              <a:t>[]byte     </a:t>
+            </a:r>
+            <a:endParaRPr lang="it-IT" sz="1200" b="0" i="0" u="none" strike="noStrike" cap="none" spc="0">
+              <a:solidFill>
+                <a:schemeClr val="bg1"/>
+              </a:solidFill>
+              <a:latin typeface="JetBrainsMono NF"/>
+              <a:cs typeface="JetBrainsMono NF"/>
+            </a:endParaRPr>
+          </a:p>
+          <a:p>
+            <a:pPr>
+              <a:defRPr/>
+            </a:pPr>
+            <a:r>
+              <a:rPr lang="it-IT" sz="1200" b="0" i="0" u="none" strike="noStrike" cap="none" spc="0">
+                <a:solidFill>
+                  <a:schemeClr val="bg1"/>
+                </a:solidFill>
+                <a:latin typeface="JetBrainsMono NF"/>
+                <a:ea typeface="JetBrainsMono NF"/>
+                <a:cs typeface="JetBrainsMono NF"/>
+              </a:rPr>
+              <a:t>}</a:t>
+            </a:r>
+            <a:endParaRPr lang="it-IT" sz="1200" b="0" i="0" u="none" strike="noStrike" cap="none" spc="0">
+              <a:solidFill>
+                <a:schemeClr val="bg1"/>
+              </a:solidFill>
+              <a:latin typeface="JetBrainsMono NF"/>
+              <a:cs typeface="JetBrainsMono NF"/>
+            </a:endParaRPr>
+          </a:p>
+          <a:p>
+            <a:pPr>
+              <a:defRPr/>
+            </a:pPr>
+            <a:endParaRPr lang="it-IT" sz="1200" b="0" i="0" u="none" strike="noStrike" cap="none" spc="0">
+              <a:solidFill>
+                <a:schemeClr val="bg1"/>
+              </a:solidFill>
+              <a:latin typeface="JetBrainsMono NF"/>
+              <a:cs typeface="JetBrainsMono NF"/>
+            </a:endParaRPr>
+          </a:p>
+          <a:p>
+            <a:pPr>
+              <a:defRPr/>
+            </a:pPr>
+            <a:r>
+              <a:rPr lang="it-IT" sz="1200" b="0" i="0" u="none" strike="noStrike" cap="none" spc="0">
+                <a:solidFill>
+                  <a:srgbClr val="9E3F19"/>
+                </a:solidFill>
+                <a:latin typeface="JetBrainsMono NF"/>
+                <a:ea typeface="JetBrainsMono NF"/>
+                <a:cs typeface="JetBrainsMono NF"/>
+              </a:rPr>
+              <a:t>type </a:t>
+            </a:r>
+            <a:r>
+              <a:rPr lang="it-IT" sz="1200" b="0" i="0" u="none" strike="noStrike" cap="none" spc="0">
+                <a:solidFill>
+                  <a:schemeClr val="bg1"/>
+                </a:solidFill>
+                <a:latin typeface="JetBrainsMono NF"/>
+                <a:ea typeface="JetBrainsMono NF"/>
+                <a:cs typeface="JetBrainsMono NF"/>
+              </a:rPr>
+              <a:t>AddressSet </a:t>
+            </a:r>
+            <a:r>
+              <a:rPr lang="it-IT" sz="1200" b="0" i="0" u="none" strike="noStrike" cap="none" spc="0">
+                <a:solidFill>
+                  <a:srgbClr val="9E3F19"/>
+                </a:solidFill>
+                <a:latin typeface="JetBrainsMono NF"/>
+                <a:ea typeface="JetBrainsMono NF"/>
+                <a:cs typeface="JetBrainsMono NF"/>
+              </a:rPr>
+              <a:t>struct </a:t>
+            </a:r>
+            <a:r>
+              <a:rPr lang="it-IT" sz="1200" b="0" i="0" u="none" strike="noStrike" cap="none" spc="0">
+                <a:solidFill>
+                  <a:schemeClr val="bg1"/>
+                </a:solidFill>
+                <a:latin typeface="JetBrainsMono NF"/>
+                <a:ea typeface="JetBrainsMono NF"/>
+                <a:cs typeface="JetBrainsMono NF"/>
+              </a:rPr>
+              <a:t>{</a:t>
+            </a:r>
+            <a:endParaRPr lang="it-IT" sz="1200" b="0" i="0" u="none" strike="noStrike" cap="none" spc="0">
+              <a:solidFill>
+                <a:schemeClr val="bg1"/>
+              </a:solidFill>
+              <a:latin typeface="JetBrainsMono NF"/>
+              <a:cs typeface="JetBrainsMono NF"/>
+            </a:endParaRPr>
+          </a:p>
+          <a:p>
+            <a:pPr>
+              <a:defRPr/>
+            </a:pPr>
+            <a:r>
+              <a:rPr lang="it-IT" sz="1200" b="0" i="0" u="none" strike="noStrike" cap="none" spc="0">
+                <a:solidFill>
+                  <a:schemeClr val="bg1"/>
+                </a:solidFill>
+                <a:latin typeface="JetBrainsMono NF"/>
+                <a:ea typeface="JetBrainsMono NF"/>
+                <a:cs typeface="JetBrainsMono NF"/>
+              </a:rPr>
+              <a:t>    </a:t>
+            </a:r>
+            <a:r>
+              <a:rPr lang="it-IT" sz="1200" b="0" i="0" u="none" strike="noStrike" cap="none" spc="0">
+                <a:solidFill>
+                  <a:srgbClr val="33ABE1"/>
+                </a:solidFill>
+                <a:latin typeface="JetBrainsMono NF"/>
+                <a:ea typeface="JetBrainsMono NF"/>
+                <a:cs typeface="JetBrainsMono NF"/>
+              </a:rPr>
+              <a:t>Legacy </a:t>
+            </a:r>
+            <a:r>
+              <a:rPr lang="it-IT" sz="1200" b="0" i="0" u="none" strike="noStrike" cap="none" spc="0">
+                <a:solidFill>
+                  <a:srgbClr val="9E3F19"/>
+                </a:solidFill>
+                <a:latin typeface="JetBrainsMono NF"/>
+                <a:ea typeface="JetBrainsMono NF"/>
+                <a:cs typeface="JetBrainsMono NF"/>
+              </a:rPr>
+              <a:t>map</a:t>
+            </a:r>
+            <a:r>
+              <a:rPr lang="it-IT" sz="1200" b="0" i="0" u="none" strike="noStrike" cap="none" spc="0">
+                <a:solidFill>
+                  <a:schemeClr val="bg1"/>
+                </a:solidFill>
+                <a:latin typeface="JetBrainsMono NF"/>
+                <a:ea typeface="JetBrainsMono NF"/>
+                <a:cs typeface="JetBrainsMono NF"/>
+              </a:rPr>
+              <a:t>[</a:t>
+            </a:r>
+            <a:r>
+              <a:rPr lang="it-IT" sz="1200" b="0" i="0" u="none" strike="noStrike" cap="none" spc="0">
+                <a:solidFill>
+                  <a:schemeClr val="bg1"/>
+                </a:solidFill>
+                <a:latin typeface="JetBrainsMono NF"/>
+                <a:ea typeface="JetBrainsMono NF"/>
+                <a:cs typeface="JetBrainsMono NF"/>
+              </a:rPr>
+              <a:t>string</a:t>
+            </a:r>
+            <a:r>
+              <a:rPr lang="it-IT" sz="1200" b="0" i="0" u="none" strike="noStrike" cap="none" spc="0">
+                <a:solidFill>
+                  <a:schemeClr val="bg1"/>
+                </a:solidFill>
+                <a:latin typeface="JetBrainsMono NF"/>
+                <a:ea typeface="JetBrainsMono NF"/>
+                <a:cs typeface="JetBrainsMono NF"/>
+              </a:rPr>
+              <a:t>]keymanager.Address</a:t>
+            </a:r>
+            <a:endParaRPr lang="it-IT" sz="1200" b="0" i="0" u="none" strike="noStrike" cap="none" spc="0">
+              <a:solidFill>
+                <a:schemeClr val="bg1"/>
+              </a:solidFill>
+              <a:latin typeface="JetBrainsMono NF"/>
+              <a:cs typeface="JetBrainsMono NF"/>
+            </a:endParaRPr>
+          </a:p>
+          <a:p>
+            <a:pPr>
+              <a:defRPr/>
+            </a:pPr>
+            <a:r>
+              <a:rPr lang="it-IT" sz="1200" b="0" i="0" u="none" strike="noStrike" cap="none" spc="0">
+                <a:solidFill>
+                  <a:schemeClr val="bg1"/>
+                </a:solidFill>
+                <a:latin typeface="JetBrainsMono NF"/>
+                <a:ea typeface="JetBrainsMono NF"/>
+                <a:cs typeface="JetBrainsMono NF"/>
+              </a:rPr>
+              <a:t>    </a:t>
+            </a:r>
+            <a:r>
+              <a:rPr lang="it-IT" sz="1200" b="0" i="0" u="none" strike="noStrike" cap="none" spc="0">
+                <a:solidFill>
+                  <a:srgbClr val="33ABE1"/>
+                </a:solidFill>
+                <a:latin typeface="JetBrainsMono NF"/>
+                <a:ea typeface="JetBrainsMono NF"/>
+                <a:cs typeface="JetBrainsMono NF"/>
+              </a:rPr>
+              <a:t>Segwit </a:t>
+            </a:r>
+            <a:r>
+              <a:rPr lang="it-IT" sz="1200" b="0" i="0" u="none" strike="noStrike" cap="none" spc="0">
+                <a:solidFill>
+                  <a:srgbClr val="9E3F19"/>
+                </a:solidFill>
+                <a:latin typeface="JetBrainsMono NF"/>
+                <a:ea typeface="JetBrainsMono NF"/>
+                <a:cs typeface="JetBrainsMono NF"/>
+              </a:rPr>
+              <a:t>map</a:t>
+            </a:r>
+            <a:r>
+              <a:rPr lang="it-IT" sz="1200" b="0" i="0" u="none" strike="noStrike" cap="none" spc="0">
+                <a:solidFill>
+                  <a:schemeClr val="bg1"/>
+                </a:solidFill>
+                <a:latin typeface="JetBrainsMono NF"/>
+                <a:ea typeface="JetBrainsMono NF"/>
+                <a:cs typeface="JetBrainsMono NF"/>
+              </a:rPr>
+              <a:t>[</a:t>
+            </a:r>
+            <a:r>
+              <a:rPr lang="it-IT" sz="1200" b="0" i="0" u="none" strike="noStrike" cap="none" spc="0">
+                <a:solidFill>
+                  <a:schemeClr val="bg1"/>
+                </a:solidFill>
+                <a:latin typeface="JetBrainsMono NF"/>
+                <a:ea typeface="JetBrainsMono NF"/>
+                <a:cs typeface="JetBrainsMono NF"/>
+              </a:rPr>
+              <a:t>string</a:t>
+            </a:r>
+            <a:r>
+              <a:rPr lang="it-IT" sz="1200" b="0" i="0" u="none" strike="noStrike" cap="none" spc="0">
+                <a:solidFill>
+                  <a:schemeClr val="bg1"/>
+                </a:solidFill>
+                <a:latin typeface="JetBrainsMono NF"/>
+                <a:ea typeface="JetBrainsMono NF"/>
+                <a:cs typeface="JetBrainsMono NF"/>
+              </a:rPr>
+              <a:t>]keymanager.Address</a:t>
+            </a:r>
+            <a:endParaRPr lang="it-IT" sz="1200" b="0" i="0" u="none" strike="noStrike" cap="none" spc="0">
+              <a:solidFill>
+                <a:schemeClr val="bg1"/>
+              </a:solidFill>
+              <a:latin typeface="JetBrainsMono NF"/>
+              <a:cs typeface="JetBrainsMono NF"/>
+            </a:endParaRPr>
+          </a:p>
+          <a:p>
+            <a:pPr>
+              <a:defRPr/>
+            </a:pPr>
+            <a:r>
+              <a:rPr lang="it-IT" sz="1200" b="0" i="0" u="none" strike="noStrike" cap="none" spc="0">
+                <a:solidFill>
+                  <a:schemeClr val="bg1"/>
+                </a:solidFill>
+                <a:latin typeface="JetBrainsMono NF"/>
+                <a:ea typeface="JetBrainsMono NF"/>
+                <a:cs typeface="JetBrainsMono NF"/>
+              </a:rPr>
+              <a:t>}</a:t>
+            </a:r>
+            <a:endParaRPr lang="it-IT" sz="1200" b="0" i="0" u="none" strike="noStrike" cap="none" spc="0">
+              <a:solidFill>
+                <a:schemeClr val="bg1"/>
+              </a:solidFill>
+              <a:latin typeface="JetBrainsMono NF"/>
+              <a:cs typeface="JetBrainsMono NF"/>
+            </a:endParaRPr>
+          </a:p>
+          <a:p>
+            <a:pPr>
+              <a:defRPr/>
+            </a:pPr>
+            <a:endParaRPr lang="it-IT" sz="1200" b="0" i="0" u="none" strike="noStrike" cap="none" spc="0">
+              <a:solidFill>
+                <a:schemeClr val="bg1"/>
+              </a:solidFill>
+              <a:latin typeface="JetBrainsMono NF"/>
+              <a:cs typeface="JetBrainsMono NF"/>
+            </a:endParaRPr>
+          </a:p>
+          <a:p>
+            <a:pPr>
+              <a:defRPr/>
+            </a:pPr>
+            <a:r>
+              <a:rPr lang="it-IT" sz="1200" b="0" i="0" u="none" strike="noStrike" cap="none" spc="0">
+                <a:solidFill>
+                  <a:srgbClr val="9E3F19"/>
+                </a:solidFill>
+                <a:latin typeface="JetBrainsMono NF"/>
+                <a:ea typeface="JetBrainsMono NF"/>
+                <a:cs typeface="JetBrainsMono NF"/>
+              </a:rPr>
+              <a:t>type </a:t>
+            </a:r>
+            <a:r>
+              <a:rPr lang="it-IT" sz="1200" b="0" i="0" u="none" strike="noStrike" cap="none" spc="0">
+                <a:solidFill>
+                  <a:schemeClr val="bg1"/>
+                </a:solidFill>
+                <a:latin typeface="JetBrainsMono NF"/>
+                <a:ea typeface="JetBrainsMono NF"/>
+                <a:cs typeface="JetBrainsMono NF"/>
+              </a:rPr>
+              <a:t>Payload </a:t>
+            </a:r>
+            <a:r>
+              <a:rPr lang="it-IT" sz="1200" b="0" i="0" u="none" strike="noStrike" cap="none" spc="0">
+                <a:solidFill>
+                  <a:srgbClr val="9E3F19"/>
+                </a:solidFill>
+                <a:latin typeface="JetBrainsMono NF"/>
+                <a:ea typeface="JetBrainsMono NF"/>
+                <a:cs typeface="JetBrainsMono NF"/>
+              </a:rPr>
+              <a:t>struct </a:t>
+            </a:r>
+            <a:r>
+              <a:rPr lang="it-IT" sz="1200" b="0" i="0" u="none" strike="noStrike" cap="none" spc="0">
+                <a:solidFill>
+                  <a:schemeClr val="bg1"/>
+                </a:solidFill>
+                <a:latin typeface="JetBrainsMono NF"/>
+                <a:ea typeface="JetBrainsMono NF"/>
+                <a:cs typeface="JetBrainsMono NF"/>
+              </a:rPr>
+              <a:t>{</a:t>
+            </a:r>
+            <a:endParaRPr lang="it-IT" sz="1200" b="0" i="0" u="none" strike="noStrike" cap="none" spc="0">
+              <a:solidFill>
+                <a:schemeClr val="bg1"/>
+              </a:solidFill>
+              <a:latin typeface="JetBrainsMono NF"/>
+              <a:cs typeface="JetBrainsMono NF"/>
+            </a:endParaRPr>
+          </a:p>
+          <a:p>
+            <a:pPr>
+              <a:defRPr/>
+            </a:pPr>
+            <a:r>
+              <a:rPr lang="it-IT" sz="1200" b="0" i="0" u="none" strike="noStrike" cap="none" spc="0">
+                <a:solidFill>
+                  <a:schemeClr val="bg1"/>
+                </a:solidFill>
+                <a:latin typeface="JetBrainsMono NF"/>
+                <a:ea typeface="JetBrainsMono NF"/>
+                <a:cs typeface="JetBrainsMono NF"/>
+              </a:rPr>
+              <a:t>    </a:t>
+            </a:r>
+            <a:r>
+              <a:rPr lang="it-IT" sz="1200" b="0" i="0" u="none" strike="noStrike" cap="none" spc="0">
+                <a:solidFill>
+                  <a:srgbClr val="33ABE1"/>
+                </a:solidFill>
+                <a:latin typeface="JetBrainsMono NF"/>
+                <a:ea typeface="JetBrainsMono NF"/>
+                <a:cs typeface="JetBrainsMono NF"/>
+              </a:rPr>
+              <a:t>Keystore  </a:t>
+            </a:r>
+            <a:r>
+              <a:rPr lang="it-IT" sz="1200" b="0" i="0" u="none" strike="noStrike" cap="none" spc="0">
+                <a:solidFill>
+                  <a:schemeClr val="bg1"/>
+                </a:solidFill>
+                <a:latin typeface="JetBrainsMono NF"/>
+                <a:ea typeface="JetBrainsMono NF"/>
+                <a:cs typeface="JetBrainsMono NF"/>
+              </a:rPr>
+              <a:t>KeystoreData</a:t>
+            </a:r>
+            <a:endParaRPr lang="it-IT" sz="1200" b="0" i="0" u="none" strike="noStrike" cap="none" spc="0">
+              <a:solidFill>
+                <a:schemeClr val="bg1"/>
+              </a:solidFill>
+              <a:latin typeface="JetBrainsMono NF"/>
+              <a:cs typeface="JetBrainsMono NF"/>
+            </a:endParaRPr>
+          </a:p>
+          <a:p>
+            <a:pPr>
+              <a:defRPr/>
+            </a:pPr>
+            <a:r>
+              <a:rPr lang="it-IT" sz="1200" b="0" i="0" u="none" strike="noStrike" cap="none" spc="0">
+                <a:solidFill>
+                  <a:schemeClr val="bg1"/>
+                </a:solidFill>
+                <a:latin typeface="JetBrainsMono NF"/>
+                <a:ea typeface="JetBrainsMono NF"/>
+                <a:cs typeface="JetBrainsMono NF"/>
+              </a:rPr>
+              <a:t>    </a:t>
+            </a:r>
+            <a:r>
+              <a:rPr lang="it-IT" sz="1200" b="0" i="0" u="none" strike="noStrike" cap="none" spc="0">
+                <a:solidFill>
+                  <a:srgbClr val="33ABE1"/>
+                </a:solidFill>
+                <a:latin typeface="JetBrainsMono NF"/>
+                <a:ea typeface="JetBrainsMono NF"/>
+                <a:cs typeface="JetBrainsMono NF"/>
+              </a:rPr>
+              <a:t>Receivers </a:t>
+            </a:r>
+            <a:r>
+              <a:rPr lang="it-IT" sz="1200" b="0" i="0" u="none" strike="noStrike" cap="none" spc="0">
+                <a:solidFill>
+                  <a:schemeClr val="bg1"/>
+                </a:solidFill>
+                <a:latin typeface="JetBrainsMono NF"/>
+                <a:ea typeface="JetBrainsMono NF"/>
+                <a:cs typeface="JetBrainsMono NF"/>
+              </a:rPr>
+              <a:t>AddressSet   </a:t>
+            </a:r>
+            <a:endParaRPr lang="it-IT" sz="1200" b="0" i="0" u="none" strike="noStrike" cap="none" spc="0">
+              <a:solidFill>
+                <a:schemeClr val="bg1"/>
+              </a:solidFill>
+              <a:latin typeface="JetBrainsMono NF"/>
+              <a:cs typeface="JetBrainsMono NF"/>
+            </a:endParaRPr>
+          </a:p>
+          <a:p>
+            <a:pPr>
+              <a:defRPr/>
+            </a:pPr>
+            <a:r>
+              <a:rPr lang="it-IT" sz="1200" b="0" i="0" u="none" strike="noStrike" cap="none" spc="0">
+                <a:solidFill>
+                  <a:schemeClr val="bg1"/>
+                </a:solidFill>
+                <a:latin typeface="JetBrainsMono NF"/>
+                <a:ea typeface="JetBrainsMono NF"/>
+                <a:cs typeface="JetBrainsMono NF"/>
+              </a:rPr>
+              <a:t>    </a:t>
+            </a:r>
+            <a:r>
+              <a:rPr lang="it-IT" sz="1200" b="0" i="0" u="none" strike="noStrike" cap="none" spc="0">
+                <a:solidFill>
+                  <a:srgbClr val="33ABE1"/>
+                </a:solidFill>
+                <a:latin typeface="JetBrainsMono NF"/>
+                <a:ea typeface="JetBrainsMono NF"/>
+                <a:cs typeface="JetBrainsMono NF"/>
+              </a:rPr>
+              <a:t>Change    </a:t>
+            </a:r>
+            <a:r>
+              <a:rPr lang="it-IT" sz="1200" b="0" i="0" u="none" strike="noStrike" cap="none" spc="0">
+                <a:solidFill>
+                  <a:schemeClr val="bg1"/>
+                </a:solidFill>
+                <a:latin typeface="JetBrainsMono NF"/>
+                <a:ea typeface="JetBrainsMono NF"/>
+                <a:cs typeface="JetBrainsMono NF"/>
+              </a:rPr>
+              <a:t>AddressSet   </a:t>
+            </a:r>
+            <a:endParaRPr lang="it-IT" sz="1200" b="0" i="0" u="none" strike="noStrike" cap="none" spc="0">
+              <a:solidFill>
+                <a:schemeClr val="bg1"/>
+              </a:solidFill>
+              <a:latin typeface="JetBrainsMono NF"/>
+              <a:cs typeface="JetBrainsMono NF"/>
+            </a:endParaRPr>
+          </a:p>
+          <a:p>
+            <a:pPr>
+              <a:defRPr/>
+            </a:pPr>
+            <a:r>
+              <a:rPr lang="it-IT" sz="1200" b="0" i="0" u="none" strike="noStrike" cap="none" spc="0">
+                <a:solidFill>
+                  <a:schemeClr val="bg1"/>
+                </a:solidFill>
+                <a:latin typeface="JetBrainsMono NF"/>
+                <a:ea typeface="JetBrainsMono NF"/>
+                <a:cs typeface="JetBrainsMono NF"/>
+              </a:rPr>
+              <a:t>}</a:t>
+            </a:r>
+            <a:endParaRPr sz="1200">
+              <a:solidFill>
+                <a:schemeClr val="bg1"/>
+              </a:solidFill>
+              <a:latin typeface="JetBrainsMono NF"/>
+              <a:cs typeface="JetBrainsMono NF"/>
+            </a:endParaRPr>
+          </a:p>
+        </p:txBody>
+      </p:sp>
     </p:spTree>
   </p:cSld>
   <p:clrMapOvr>
@@ -19469,7 +20546,7 @@
       </p:grpSpPr>
       <p:pic>
         <p:nvPicPr>
-          <p:cNvPr id="514865101" name="Google Shape;292;p22" descr="image.png"/>
+          <p:cNvPr id="1470238364" name="Google Shape;292;p22" descr="image.png"/>
           <p:cNvPicPr/>
           <p:nvPr/>
         </p:nvPicPr>
@@ -19496,7 +20573,7 @@
       </p:pic>
       <p:pic>
         <p:nvPicPr>
-          <p:cNvPr id="654581562" name="Google Shape;293;p22" descr="image.png"/>
+          <p:cNvPr id="338300336" name="Google Shape;293;p22" descr="image.png"/>
           <p:cNvPicPr/>
           <p:nvPr/>
         </p:nvPicPr>
@@ -19523,7 +20600,7 @@
       </p:pic>
       <p:pic>
         <p:nvPicPr>
-          <p:cNvPr id="779789110" name="Google Shape;294;p22" descr="image.png"/>
+          <p:cNvPr id="55135693" name="Google Shape;294;p22" descr="image.png"/>
           <p:cNvPicPr/>
           <p:nvPr/>
         </p:nvPicPr>
@@ -19550,7 +20627,7 @@
       </p:pic>
       <p:pic>
         <p:nvPicPr>
-          <p:cNvPr id="1155710384" name="Google Shape;295;p22" descr="image.png"/>
+          <p:cNvPr id="1575071535" name="Google Shape;295;p22" descr="image.png"/>
           <p:cNvPicPr/>
           <p:nvPr/>
         </p:nvPicPr>
@@ -19577,7 +20654,7 @@
       </p:pic>
       <p:pic>
         <p:nvPicPr>
-          <p:cNvPr id="1940054245" name="Google Shape;296;p22" descr="image.png"/>
+          <p:cNvPr id="108018451" name="Google Shape;296;p22" descr="image.png"/>
           <p:cNvPicPr/>
           <p:nvPr/>
         </p:nvPicPr>
@@ -19604,7 +20681,7 @@
       </p:pic>
       <p:sp>
         <p:nvSpPr>
-          <p:cNvPr id="893826124" name="Google Shape;297;p22"/>
+          <p:cNvPr id="695444289" name="Google Shape;297;p22"/>
           <p:cNvSpPr txBox="1"/>
           <p:nvPr/>
         </p:nvSpPr>
@@ -19654,7 +20731,7 @@
       </p:sp>
       <p:sp>
         <p:nvSpPr>
-          <p:cNvPr id="1947885613" name="Google Shape;298;p22"/>
+          <p:cNvPr id="1158980034" name="Google Shape;298;p22"/>
           <p:cNvSpPr txBox="1"/>
           <p:nvPr/>
         </p:nvSpPr>
@@ -19704,7 +20781,7 @@
       </p:sp>
       <p:pic>
         <p:nvPicPr>
-          <p:cNvPr id="803329918" name="Google Shape;299;p22" descr="image.png"/>
+          <p:cNvPr id="2016608946" name="Google Shape;299;p22" descr="image.png"/>
           <p:cNvPicPr/>
           <p:nvPr/>
         </p:nvPicPr>
@@ -19731,7 +20808,7 @@
       </p:pic>
       <p:pic>
         <p:nvPicPr>
-          <p:cNvPr id="808396282" name="Google Shape;300;p22" descr="image.png"/>
+          <p:cNvPr id="2031759353" name="Google Shape;300;p22" descr="image.png"/>
           <p:cNvPicPr/>
           <p:nvPr/>
         </p:nvPicPr>
@@ -19758,7 +20835,7 @@
       </p:pic>
       <p:pic>
         <p:nvPicPr>
-          <p:cNvPr id="619332872" name="Google Shape;301;p22" descr="image.png"/>
+          <p:cNvPr id="2087654206" name="Google Shape;301;p22" descr="image.png"/>
           <p:cNvPicPr/>
           <p:nvPr/>
         </p:nvPicPr>
@@ -19785,7 +20862,7 @@
       </p:pic>
       <p:sp>
         <p:nvSpPr>
-          <p:cNvPr id="748505615" name="Google Shape;302;p22"/>
+          <p:cNvPr id="1621139766" name="Google Shape;302;p22"/>
           <p:cNvSpPr txBox="1"/>
           <p:nvPr/>
         </p:nvSpPr>
@@ -19835,7 +20912,7 @@
       </p:sp>
       <p:sp>
         <p:nvSpPr>
-          <p:cNvPr id="1928763564" name="Google Shape;303;p22"/>
+          <p:cNvPr id="244412308" name="Google Shape;303;p22"/>
           <p:cNvSpPr txBox="1"/>
           <p:nvPr/>
         </p:nvSpPr>
@@ -19888,7 +20965,7 @@
       </p:sp>
       <p:sp>
         <p:nvSpPr>
-          <p:cNvPr id="997370807" name="Google Shape;304;p22"/>
+          <p:cNvPr id="1842037017" name="Google Shape;304;p22"/>
           <p:cNvSpPr txBox="1"/>
           <p:nvPr/>
         </p:nvSpPr>
@@ -19938,7 +21015,7 @@
       </p:sp>
       <p:sp>
         <p:nvSpPr>
-          <p:cNvPr id="2087984343" name="Google Shape;305;p22"/>
+          <p:cNvPr id="405434809" name="Google Shape;305;p22"/>
           <p:cNvSpPr txBox="1"/>
           <p:nvPr/>
         </p:nvSpPr>
@@ -20031,7 +21108,7 @@
       </p:grpSpPr>
       <p:pic>
         <p:nvPicPr>
-          <p:cNvPr id="775355727" name="Google Shape;310;p23" descr="image.png"/>
+          <p:cNvPr id="255959575" name="Google Shape;310;p23" descr="image.png"/>
           <p:cNvPicPr/>
           <p:nvPr/>
         </p:nvPicPr>
@@ -20058,7 +21135,7 @@
       </p:pic>
       <p:pic>
         <p:nvPicPr>
-          <p:cNvPr id="1293452215" name="Google Shape;311;p23" descr="image.png"/>
+          <p:cNvPr id="1079352043" name="Google Shape;311;p23" descr="image.png"/>
           <p:cNvPicPr/>
           <p:nvPr/>
         </p:nvPicPr>
@@ -20085,7 +21162,7 @@
       </p:pic>
       <p:sp>
         <p:nvSpPr>
-          <p:cNvPr id="1624558273" name="Google Shape;312;p23"/>
+          <p:cNvPr id="1459816168" name="Google Shape;312;p23"/>
           <p:cNvSpPr txBox="1"/>
           <p:nvPr/>
         </p:nvSpPr>
@@ -20135,7 +21212,7 @@
       </p:sp>
       <p:sp>
         <p:nvSpPr>
-          <p:cNvPr id="2019768443" name="Google Shape;313;p23"/>
+          <p:cNvPr id="568048933" name="Google Shape;313;p23"/>
           <p:cNvSpPr txBox="1"/>
           <p:nvPr/>
         </p:nvSpPr>
@@ -20185,7 +21262,7 @@
       </p:sp>
       <p:pic>
         <p:nvPicPr>
-          <p:cNvPr id="2061143228" name="Google Shape;314;p23" descr="image.png"/>
+          <p:cNvPr id="1161116411" name="Google Shape;314;p23" descr="image.png"/>
           <p:cNvPicPr/>
           <p:nvPr/>
         </p:nvPicPr>
@@ -20212,7 +21289,7 @@
       </p:pic>
       <p:sp>
         <p:nvSpPr>
-          <p:cNvPr id="1611910714" name="Google Shape;315;p23"/>
+          <p:cNvPr id="1847063835" name="Google Shape;315;p23"/>
           <p:cNvSpPr txBox="1"/>
           <p:nvPr/>
         </p:nvSpPr>
@@ -20262,7 +21339,7 @@
       </p:sp>
       <p:sp>
         <p:nvSpPr>
-          <p:cNvPr id="676489011" name="Google Shape;316;p23"/>
+          <p:cNvPr id="578119891" name="Google Shape;316;p23"/>
           <p:cNvSpPr txBox="1"/>
           <p:nvPr/>
         </p:nvSpPr>
@@ -20326,7 +21403,7 @@
       </p:sp>
       <p:sp>
         <p:nvSpPr>
-          <p:cNvPr id="1399738360" name="Google Shape;317;p23"/>
+          <p:cNvPr id="1318764903" name="Google Shape;317;p23"/>
           <p:cNvSpPr txBox="1"/>
           <p:nvPr/>
         </p:nvSpPr>
@@ -20390,7 +21467,7 @@
       </p:sp>
       <p:sp>
         <p:nvSpPr>
-          <p:cNvPr id="1418313157" name="Google Shape;318;p23"/>
+          <p:cNvPr id="723631368" name="Google Shape;318;p23"/>
           <p:cNvSpPr txBox="1"/>
           <p:nvPr/>
         </p:nvSpPr>
@@ -20454,7 +21531,7 @@
       </p:sp>
       <p:sp>
         <p:nvSpPr>
-          <p:cNvPr id="423681158" name="Google Shape;319;p23"/>
+          <p:cNvPr id="463096919" name="Google Shape;319;p23"/>
           <p:cNvSpPr txBox="1"/>
           <p:nvPr/>
         </p:nvSpPr>
@@ -20507,7 +21584,7 @@
       </p:sp>
       <p:sp>
         <p:nvSpPr>
-          <p:cNvPr id="1606620244" name="Google Shape;320;p23"/>
+          <p:cNvPr id="2104758219" name="Google Shape;320;p23"/>
           <p:cNvSpPr txBox="1"/>
           <p:nvPr/>
         </p:nvSpPr>
@@ -20560,7 +21637,7 @@
       </p:sp>
       <p:sp>
         <p:nvSpPr>
-          <p:cNvPr id="1754847569" name="Google Shape;321;p23"/>
+          <p:cNvPr id="663786064" name="Google Shape;321;p23"/>
           <p:cNvSpPr txBox="1"/>
           <p:nvPr/>
         </p:nvSpPr>
@@ -20613,7 +21690,7 @@
       </p:sp>
       <p:sp>
         <p:nvSpPr>
-          <p:cNvPr id="234633351" name="Google Shape;322;p23"/>
+          <p:cNvPr id="1312548968" name="Google Shape;322;p23"/>
           <p:cNvSpPr txBox="1"/>
           <p:nvPr/>
         </p:nvSpPr>
@@ -20666,7 +21743,7 @@
       </p:sp>
       <p:sp>
         <p:nvSpPr>
-          <p:cNvPr id="1137013712" name="Google Shape;323;p23"/>
+          <p:cNvPr id="1626329623" name="Google Shape;323;p23"/>
           <p:cNvSpPr txBox="1"/>
           <p:nvPr/>
         </p:nvSpPr>
@@ -20719,7 +21796,7 @@
       </p:sp>
       <p:sp>
         <p:nvSpPr>
-          <p:cNvPr id="630134413" name="Google Shape;324;p23"/>
+          <p:cNvPr id="98338502" name="Google Shape;324;p23"/>
           <p:cNvSpPr txBox="1"/>
           <p:nvPr/>
         </p:nvSpPr>
@@ -20772,7 +21849,7 @@
       </p:sp>
       <p:sp>
         <p:nvSpPr>
-          <p:cNvPr id="1495340135" name="Google Shape;325;p23"/>
+          <p:cNvPr id="1526777916" name="Google Shape;325;p23"/>
           <p:cNvSpPr txBox="1"/>
           <p:nvPr/>
         </p:nvSpPr>
@@ -20825,7 +21902,7 @@
       </p:sp>
       <p:sp>
         <p:nvSpPr>
-          <p:cNvPr id="1168088090" name="Google Shape;326;p23"/>
+          <p:cNvPr id="1780553155" name="Google Shape;326;p23"/>
           <p:cNvSpPr txBox="1"/>
           <p:nvPr/>
         </p:nvSpPr>
@@ -20878,7 +21955,7 @@
       </p:sp>
       <p:sp>
         <p:nvSpPr>
-          <p:cNvPr id="1031458799" name="Google Shape;327;p23"/>
+          <p:cNvPr id="1618164824" name="Google Shape;327;p23"/>
           <p:cNvSpPr txBox="1"/>
           <p:nvPr/>
         </p:nvSpPr>
@@ -20931,7 +22008,7 @@
       </p:sp>
       <p:sp>
         <p:nvSpPr>
-          <p:cNvPr id="1660458226" name="Google Shape;328;p23"/>
+          <p:cNvPr id="1337852851" name="Google Shape;328;p23"/>
           <p:cNvSpPr txBox="1"/>
           <p:nvPr/>
         </p:nvSpPr>
@@ -20984,7 +22061,7 @@
       </p:sp>
       <p:sp>
         <p:nvSpPr>
-          <p:cNvPr id="2065684129" name="Google Shape;329;p23"/>
+          <p:cNvPr id="1009286424" name="Google Shape;329;p23"/>
           <p:cNvSpPr txBox="1"/>
           <p:nvPr/>
         </p:nvSpPr>
@@ -21037,7 +22114,7 @@
       </p:sp>
       <p:sp>
         <p:nvSpPr>
-          <p:cNvPr id="1292040001" name="Google Shape;330;p23"/>
+          <p:cNvPr id="1310274759" name="Google Shape;330;p23"/>
           <p:cNvSpPr txBox="1"/>
           <p:nvPr/>
         </p:nvSpPr>
@@ -21090,7 +22167,7 @@
       </p:sp>
       <p:pic>
         <p:nvPicPr>
-          <p:cNvPr id="632107444" name="Google Shape;331;p23" descr="image.png"/>
+          <p:cNvPr id="1464628372" name="Google Shape;331;p23" descr="image.png"/>
           <p:cNvPicPr/>
           <p:nvPr/>
         </p:nvPicPr>
@@ -21117,7 +22194,7 @@
       </p:pic>
       <p:pic>
         <p:nvPicPr>
-          <p:cNvPr id="2039472289" name="Google Shape;332;p23" descr="image.png"/>
+          <p:cNvPr id="2027187585" name="Google Shape;332;p23" descr="image.png"/>
           <p:cNvPicPr/>
           <p:nvPr/>
         </p:nvPicPr>
@@ -21144,7 +22221,7 @@
       </p:pic>
       <p:pic>
         <p:nvPicPr>
-          <p:cNvPr id="570979177" name="Google Shape;333;p23" descr="image.png"/>
+          <p:cNvPr id="1751386283" name="Google Shape;333;p23" descr="image.png"/>
           <p:cNvPicPr/>
           <p:nvPr/>
         </p:nvPicPr>
@@ -21211,7 +22288,7 @@
       </p:grpSpPr>
       <p:pic>
         <p:nvPicPr>
-          <p:cNvPr id="1330095257" name="Google Shape;98;p14" descr="image.png"/>
+          <p:cNvPr id="1544043529" name="Google Shape;98;p14" descr="image.png"/>
           <p:cNvPicPr/>
           <p:nvPr/>
         </p:nvPicPr>
@@ -21238,7 +22315,7 @@
       </p:pic>
       <p:pic>
         <p:nvPicPr>
-          <p:cNvPr id="1667412466" name="Google Shape;99;p14" descr="image.png"/>
+          <p:cNvPr id="606257321" name="Google Shape;99;p14" descr="image.png"/>
           <p:cNvPicPr/>
           <p:nvPr/>
         </p:nvPicPr>
@@ -21265,7 +22342,7 @@
       </p:pic>
       <p:pic>
         <p:nvPicPr>
-          <p:cNvPr id="716433188" name="Google Shape;100;p14" descr="image.png"/>
+          <p:cNvPr id="1470987881" name="Google Shape;100;p14" descr="image.png"/>
           <p:cNvPicPr/>
           <p:nvPr/>
         </p:nvPicPr>
@@ -21292,7 +22369,7 @@
       </p:pic>
       <p:pic>
         <p:nvPicPr>
-          <p:cNvPr id="1392357385" name="Google Shape;101;p14" descr="image.png"/>
+          <p:cNvPr id="676704086" name="Google Shape;101;p14" descr="image.png"/>
           <p:cNvPicPr/>
           <p:nvPr/>
         </p:nvPicPr>
@@ -21319,7 +22396,7 @@
       </p:pic>
       <p:sp>
         <p:nvSpPr>
-          <p:cNvPr id="1941709220" name="Google Shape;102;p14"/>
+          <p:cNvPr id="1547181896" name="Google Shape;102;p14"/>
           <p:cNvSpPr txBox="1"/>
           <p:nvPr/>
         </p:nvSpPr>
@@ -21369,7 +22446,7 @@
       </p:sp>
       <p:pic>
         <p:nvPicPr>
-          <p:cNvPr id="1912042904" name="Google Shape;104;p14" descr="image.png"/>
+          <p:cNvPr id="17751858" name="Google Shape;104;p14" descr="image.png"/>
           <p:cNvPicPr/>
           <p:nvPr/>
         </p:nvPicPr>
@@ -21396,7 +22473,7 @@
       </p:pic>
       <p:sp>
         <p:nvSpPr>
-          <p:cNvPr id="696308683" name="Google Shape;107;p14"/>
+          <p:cNvPr id="1252135923" name="Google Shape;107;p14"/>
           <p:cNvSpPr txBox="1"/>
           <p:nvPr/>
         </p:nvSpPr>
@@ -21452,7 +22529,7 @@
       </p:sp>
       <p:sp>
         <p:nvSpPr>
-          <p:cNvPr id="1796673975" name="Google Shape;110;p14"/>
+          <p:cNvPr id="1277369179" name="Google Shape;110;p14"/>
           <p:cNvSpPr txBox="1"/>
           <p:nvPr/>
         </p:nvSpPr>
@@ -21508,7 +22585,7 @@
       </p:sp>
       <p:sp>
         <p:nvSpPr>
-          <p:cNvPr id="1917007423" name="Google Shape;113;p14"/>
+          <p:cNvPr id="458655842" name="Google Shape;113;p14"/>
           <p:cNvSpPr txBox="1"/>
           <p:nvPr/>
         </p:nvSpPr>
@@ -21564,7 +22641,7 @@
       </p:sp>
       <p:pic>
         <p:nvPicPr>
-          <p:cNvPr id="403949452" name="Google Shape;114;p14" descr="image.png"/>
+          <p:cNvPr id="409774833" name="Google Shape;114;p14" descr="image.png"/>
           <p:cNvPicPr/>
           <p:nvPr/>
         </p:nvPicPr>
@@ -21591,7 +22668,7 @@
       </p:pic>
       <p:pic>
         <p:nvPicPr>
-          <p:cNvPr id="497206122" name="Google Shape;115;p14" descr="image.png"/>
+          <p:cNvPr id="2041379703" name="Google Shape;115;p14" descr="image.png"/>
           <p:cNvPicPr/>
           <p:nvPr/>
         </p:nvPicPr>
@@ -21618,7 +22695,7 @@
       </p:pic>
       <p:pic>
         <p:nvPicPr>
-          <p:cNvPr id="710210414" name="Google Shape;116;p14" descr="image.png"/>
+          <p:cNvPr id="123200341" name="Google Shape;116;p14" descr="image.png"/>
           <p:cNvPicPr/>
           <p:nvPr/>
         </p:nvPicPr>
@@ -21645,7 +22722,7 @@
       </p:pic>
       <p:sp>
         <p:nvSpPr>
-          <p:cNvPr id="1910107606" name="Flowchart: Alternate process 57549366"/>
+          <p:cNvPr id="162443041" name="Flowchart: Alternate process 57549366"/>
           <p:cNvSpPr/>
           <p:nvPr/>
         </p:nvSpPr>
@@ -21717,7 +22794,7 @@
       </p:sp>
       <p:sp>
         <p:nvSpPr>
-          <p:cNvPr id="731265208" name="Flowchart: Alternate process 57549366"/>
+          <p:cNvPr id="2033178410" name="Flowchart: Alternate process 57549366"/>
           <p:cNvSpPr/>
           <p:nvPr/>
         </p:nvSpPr>
@@ -21789,7 +22866,7 @@
       </p:sp>
       <p:sp>
         <p:nvSpPr>
-          <p:cNvPr id="867044917" name="Flowchart: Alternate process 57549366"/>
+          <p:cNvPr id="456596851" name="Flowchart: Alternate process 57549366"/>
           <p:cNvSpPr/>
           <p:nvPr/>
         </p:nvSpPr>
@@ -21901,7 +22978,7 @@
       </p:grpSpPr>
       <p:sp>
         <p:nvSpPr>
-          <p:cNvPr id="1317569530" name="Google Shape;312;p23"/>
+          <p:cNvPr id="98141338" name="Google Shape;312;p23"/>
           <p:cNvSpPr txBox="1"/>
           <p:nvPr/>
         </p:nvSpPr>
@@ -21951,7 +23028,7 @@
       </p:sp>
       <p:sp>
         <p:nvSpPr>
-          <p:cNvPr id="1009487694" name="Google Shape;313;p23"/>
+          <p:cNvPr id="799444284" name="Google Shape;313;p23"/>
           <p:cNvSpPr txBox="1"/>
           <p:nvPr/>
         </p:nvSpPr>
@@ -22001,7 +23078,7 @@
       </p:sp>
       <p:pic>
         <p:nvPicPr>
-          <p:cNvPr id="692558073" name="Google Shape;314;p23" descr="image.png"/>
+          <p:cNvPr id="1015115902" name="Google Shape;314;p23" descr="image.png"/>
           <p:cNvPicPr/>
           <p:nvPr/>
         </p:nvPicPr>
@@ -22068,7 +23145,7 @@
       </p:grpSpPr>
       <p:pic>
         <p:nvPicPr>
-          <p:cNvPr id="1222597959" name="Google Shape;121;p15" descr="image.png"/>
+          <p:cNvPr id="1280169258" name="Google Shape;121;p15" descr="image.png"/>
           <p:cNvPicPr/>
           <p:nvPr/>
         </p:nvPicPr>
@@ -22095,7 +23172,7 @@
       </p:pic>
       <p:sp>
         <p:nvSpPr>
-          <p:cNvPr id="1018430181" name="Google Shape;124;p15"/>
+          <p:cNvPr id="876357740" name="Google Shape;124;p15"/>
           <p:cNvSpPr txBox="1"/>
           <p:nvPr/>
         </p:nvSpPr>
@@ -22145,7 +23222,7 @@
       </p:sp>
       <p:pic>
         <p:nvPicPr>
-          <p:cNvPr id="1722476391" name="Google Shape;126;p15" descr="image.png"/>
+          <p:cNvPr id="121019071" name="Google Shape;126;p15" descr="image.png"/>
           <p:cNvPicPr/>
           <p:nvPr/>
         </p:nvPicPr>
@@ -22172,7 +23249,7 @@
       </p:pic>
       <p:grpSp>
         <p:nvGrpSpPr>
-          <p:cNvPr id="1470074615" name=""/>
+          <p:cNvPr id="371843384" name=""/>
           <p:cNvGrpSpPr/>
           <p:nvPr/>
         </p:nvGrpSpPr>
@@ -22303,7 +23380,7 @@
       </p:grpSp>
       <p:sp>
         <p:nvSpPr>
-          <p:cNvPr id="1545569775" name=""/>
+          <p:cNvPr id="2079287871" name=""/>
           <p:cNvSpPr txBox="1"/>
           <p:nvPr/>
         </p:nvSpPr>
@@ -22961,7 +24038,7 @@
       </p:sp>
       <p:graphicFrame>
         <p:nvGraphicFramePr>
-          <p:cNvPr id="1671614390" name="Table 1475532730"/>
+          <p:cNvPr id="623975342" name="Table 1475532730"/>
           <p:cNvGraphicFramePr>
             <a:graphicFrameLocks xmlns:a="http://schemas.openxmlformats.org/drawingml/2006/main"/>
           </p:cNvGraphicFramePr>
@@ -24265,7 +25342,7 @@
       </p:grpSpPr>
       <p:pic>
         <p:nvPicPr>
-          <p:cNvPr id="492179008" name="Google Shape;121;p15" descr="image.png"/>
+          <p:cNvPr id="1340085429" name="Google Shape;121;p15" descr="image.png"/>
           <p:cNvPicPr/>
           <p:nvPr/>
         </p:nvPicPr>
@@ -24292,7 +25369,7 @@
       </p:pic>
       <p:sp>
         <p:nvSpPr>
-          <p:cNvPr id="2035638" name="Google Shape;124;p15"/>
+          <p:cNvPr id="173837501" name="Google Shape;124;p15"/>
           <p:cNvSpPr txBox="1"/>
           <p:nvPr/>
         </p:nvSpPr>
@@ -24397,7 +25474,7 @@
       </p:sp>
       <p:pic>
         <p:nvPicPr>
-          <p:cNvPr id="519771330" name="Google Shape;126;p15" descr="image.png"/>
+          <p:cNvPr id="1385983050" name="Google Shape;126;p15" descr="image.png"/>
           <p:cNvPicPr/>
           <p:nvPr/>
         </p:nvPicPr>
@@ -24424,7 +25501,7 @@
       </p:pic>
       <p:grpSp>
         <p:nvGrpSpPr>
-          <p:cNvPr id="287083699" name=""/>
+          <p:cNvPr id="1481793247" name=""/>
           <p:cNvGrpSpPr/>
           <p:nvPr/>
         </p:nvGrpSpPr>
@@ -24574,7 +25651,7 @@
       </p:grpSp>
       <p:sp>
         <p:nvSpPr>
-          <p:cNvPr id="2010288401" name=""/>
+          <p:cNvPr id="1039507789" name=""/>
           <p:cNvSpPr txBox="1"/>
           <p:nvPr/>
         </p:nvSpPr>
@@ -24938,7 +26015,7 @@
       </p:sp>
       <p:pic>
         <p:nvPicPr>
-          <p:cNvPr id="91158317" name="Google Shape;144;p15" descr="image.png"/>
+          <p:cNvPr id="1762224301" name="Google Shape;144;p15" descr="image.png"/>
           <p:cNvPicPr/>
           <p:nvPr/>
         </p:nvPicPr>
@@ -25005,7 +26082,7 @@
       </p:grpSpPr>
       <p:pic>
         <p:nvPicPr>
-          <p:cNvPr id="781492216" name="Google Shape;121;p15" descr="image.png"/>
+          <p:cNvPr id="1420149219" name="Google Shape;121;p15" descr="image.png"/>
           <p:cNvPicPr/>
           <p:nvPr/>
         </p:nvPicPr>
@@ -25032,7 +26109,7 @@
       </p:pic>
       <p:sp>
         <p:nvSpPr>
-          <p:cNvPr id="1766597692" name="Google Shape;124;p15"/>
+          <p:cNvPr id="1009343424" name="Google Shape;124;p15"/>
           <p:cNvSpPr txBox="1"/>
           <p:nvPr/>
         </p:nvSpPr>
@@ -25137,7 +26214,7 @@
       </p:sp>
       <p:pic>
         <p:nvPicPr>
-          <p:cNvPr id="2110019423" name="Google Shape;126;p15" descr="image.png"/>
+          <p:cNvPr id="686953332" name="Google Shape;126;p15" descr="image.png"/>
           <p:cNvPicPr/>
           <p:nvPr/>
         </p:nvPicPr>
@@ -25164,7 +26241,7 @@
       </p:pic>
       <p:pic>
         <p:nvPicPr>
-          <p:cNvPr id="699164424" name="Google Shape;144;p15" descr="image.png"/>
+          <p:cNvPr id="1398294137" name="Google Shape;144;p15" descr="image.png"/>
           <p:cNvPicPr/>
           <p:nvPr/>
         </p:nvPicPr>
@@ -25191,7 +26268,7 @@
       </p:pic>
       <p:grpSp>
         <p:nvGrpSpPr>
-          <p:cNvPr id="532890536" name=""/>
+          <p:cNvPr id="1750304832" name=""/>
           <p:cNvGrpSpPr/>
           <p:nvPr/>
         </p:nvGrpSpPr>
@@ -25790,7 +26867,7 @@
       </p:grpSp>
       <p:pic>
         <p:nvPicPr>
-          <p:cNvPr id="257983962" name="Google Shape;154;p16" descr="image.png"/>
+          <p:cNvPr id="1111107398" name="Google Shape;154;p16" descr="image.png"/>
           <p:cNvPicPr/>
           <p:nvPr/>
         </p:nvPicPr>
@@ -25817,7 +26894,7 @@
       </p:pic>
       <p:sp>
         <p:nvSpPr>
-          <p:cNvPr id="1153331502" name="Google Shape;163;p16"/>
+          <p:cNvPr id="864562069" name="Google Shape;163;p16"/>
           <p:cNvSpPr txBox="1"/>
           <p:nvPr/>
         </p:nvSpPr>
@@ -25878,7 +26955,7 @@
       </p:sp>
       <p:sp>
         <p:nvSpPr>
-          <p:cNvPr id="325670592" name="Google Shape;164;p16"/>
+          <p:cNvPr id="1677397067" name="Google Shape;164;p16"/>
           <p:cNvSpPr txBox="1"/>
           <p:nvPr/>
         </p:nvSpPr>
@@ -25971,7 +27048,7 @@
       </p:sp>
       <p:sp>
         <p:nvSpPr>
-          <p:cNvPr id="2101265291" name="Google Shape;165;p16"/>
+          <p:cNvPr id="101449057" name="Google Shape;165;p16"/>
           <p:cNvSpPr/>
           <p:nvPr/>
         </p:nvSpPr>
@@ -26019,7 +27096,7 @@
       </p:sp>
       <p:sp>
         <p:nvSpPr>
-          <p:cNvPr id="455597848" name="Google Shape;164;p16"/>
+          <p:cNvPr id="1267100178" name="Google Shape;164;p16"/>
           <p:cNvSpPr txBox="1"/>
           <p:nvPr/>
         </p:nvSpPr>
@@ -26850,7 +27927,7 @@
       </p:grpSpPr>
       <p:pic>
         <p:nvPicPr>
-          <p:cNvPr id="1646253972" name="Google Shape;152;p16" descr="image.png"/>
+          <p:cNvPr id="1789272256" name="Google Shape;152;p16" descr="image.png"/>
           <p:cNvPicPr/>
           <p:nvPr/>
         </p:nvPicPr>
@@ -26877,7 +27954,7 @@
       </p:pic>
       <p:sp>
         <p:nvSpPr>
-          <p:cNvPr id="843255273" name="Google Shape;155;p16"/>
+          <p:cNvPr id="906652892" name="Google Shape;155;p16"/>
           <p:cNvSpPr txBox="1"/>
           <p:nvPr/>
         </p:nvSpPr>
@@ -26927,7 +28004,7 @@
       </p:sp>
       <p:pic>
         <p:nvPicPr>
-          <p:cNvPr id="2066646786" name="Google Shape;157;p16" descr="image.png"/>
+          <p:cNvPr id="2142954995" name="Google Shape;157;p16" descr="image.png"/>
           <p:cNvPicPr/>
           <p:nvPr/>
         </p:nvPicPr>
@@ -26954,7 +28031,7 @@
       </p:pic>
       <p:pic>
         <p:nvPicPr>
-          <p:cNvPr id="296928981" name="Google Shape;122;p15" descr="image.png"/>
+          <p:cNvPr id="441627145" name="Google Shape;122;p15" descr="image.png"/>
           <p:cNvPicPr/>
           <p:nvPr/>
         </p:nvPicPr>
@@ -26981,7 +28058,7 @@
       </p:pic>
       <p:sp>
         <p:nvSpPr>
-          <p:cNvPr id="1613719288" name="Google Shape;131;p15"/>
+          <p:cNvPr id="1961164936" name="Google Shape;131;p15"/>
           <p:cNvSpPr txBox="1"/>
           <p:nvPr/>
         </p:nvSpPr>
@@ -27093,7 +28170,7 @@
       </p:sp>
       <p:sp>
         <p:nvSpPr>
-          <p:cNvPr id="1313842717" name="Google Shape;158;p16"/>
+          <p:cNvPr id="1967978594" name="Google Shape;158;p16"/>
           <p:cNvSpPr txBox="1"/>
           <p:nvPr/>
         </p:nvSpPr>
@@ -27154,7 +28231,7 @@
       </p:sp>
       <p:sp>
         <p:nvSpPr>
-          <p:cNvPr id="881084171" name=""/>
+          <p:cNvPr id="530391337" name=""/>
           <p:cNvSpPr txBox="1"/>
           <p:nvPr/>
         </p:nvSpPr>
@@ -27518,7 +28595,7 @@
       </p:sp>
       <p:sp>
         <p:nvSpPr>
-          <p:cNvPr id="2118965329" name=""/>
+          <p:cNvPr id="875057503" name=""/>
           <p:cNvSpPr/>
           <p:nvPr/>
         </p:nvSpPr>
@@ -27623,7 +28700,7 @@
       </p:grpSpPr>
       <p:pic>
         <p:nvPicPr>
-          <p:cNvPr id="1617769964" name="Google Shape;152;p16" descr="image.png"/>
+          <p:cNvPr id="1979296683" name="Google Shape;152;p16" descr="image.png"/>
           <p:cNvPicPr/>
           <p:nvPr/>
         </p:nvPicPr>
@@ -27650,7 +28727,7 @@
       </p:pic>
       <p:sp>
         <p:nvSpPr>
-          <p:cNvPr id="1799586238" name="Google Shape;155;p16"/>
+          <p:cNvPr id="571923103" name="Google Shape;155;p16"/>
           <p:cNvSpPr txBox="1"/>
           <p:nvPr/>
         </p:nvSpPr>
@@ -27700,7 +28777,7 @@
       </p:sp>
       <p:pic>
         <p:nvPicPr>
-          <p:cNvPr id="2135772905" name="Google Shape;157;p16" descr="image.png"/>
+          <p:cNvPr id="2044619099" name="Google Shape;157;p16" descr="image.png"/>
           <p:cNvPicPr/>
           <p:nvPr/>
         </p:nvPicPr>
@@ -27727,7 +28804,7 @@
       </p:pic>
       <p:sp>
         <p:nvSpPr>
-          <p:cNvPr id="1846110791" name=""/>
+          <p:cNvPr id="1618173322" name=""/>
           <p:cNvSpPr txBox="1"/>
           <p:nvPr/>
         </p:nvSpPr>
@@ -27755,7 +28832,7 @@
       </p:sp>
       <p:sp>
         <p:nvSpPr>
-          <p:cNvPr id="1736128733" name=""/>
+          <p:cNvPr id="20722475" name=""/>
           <p:cNvSpPr txBox="1"/>
           <p:nvPr/>
         </p:nvSpPr>
@@ -27783,7 +28860,7 @@
       </p:sp>
       <p:pic>
         <p:nvPicPr>
-          <p:cNvPr id="1214136846" name=""/>
+          <p:cNvPr id="813787062" name=""/>
           <p:cNvPicPr>
             <a:picLocks noChangeAspect="1"/>
           </p:cNvPicPr>
@@ -27805,14 +28882,14 @@
       </p:pic>
       <p:sp>
         <p:nvSpPr>
-          <p:cNvPr id="96934350" name=""/>
+          <p:cNvPr id="1661206761" name=""/>
           <p:cNvSpPr txBox="1"/>
           <p:nvPr/>
         </p:nvSpPr>
         <p:spPr bwMode="auto">
           <a:xfrm rot="0" flipH="0" flipV="0">
-            <a:off x="466724" y="1821958"/>
-            <a:ext cx="2450837" cy="1310999"/>
+            <a:off x="466723" y="1821957"/>
+            <a:ext cx="2451196" cy="1310999"/>
           </a:xfrm>
           <a:prstGeom prst="rect">
             <a:avLst/>
@@ -27994,7 +29071,7 @@
             <a:r>
               <a:rPr lang="it-IT" sz="1000" b="0" i="0" u="none" strike="noStrike" cap="none" spc="0">
                 <a:solidFill>
-                  <a:srgbClr val="37BAF5"/>
+                  <a:srgbClr val="33ABE1"/>
                 </a:solidFill>
                 <a:latin typeface="JetBrainsMono NF"/>
                 <a:ea typeface="JetBrainsMono NF"/>
@@ -28005,13 +29082,24 @@
             <a:r>
               <a:rPr lang="it-IT" sz="1000" b="0" i="0" u="none" strike="noStrike" cap="none" spc="0">
                 <a:solidFill>
-                  <a:schemeClr val="bg1"/>
+                  <a:srgbClr val="33ABE1"/>
                 </a:solidFill>
                 <a:latin typeface="JetBrainsMono NF"/>
                 <a:ea typeface="JetBrainsMono NF"/>
                 <a:cs typeface="JetBrainsMono NF"/>
               </a:rPr>
-              <a:t>   [</a:t>
+              <a:t>   </a:t>
+            </a:r>
+            <a:r>
+              <a:rPr lang="it-IT" sz="1000" b="0" i="0" u="none" strike="noStrike" cap="none" spc="0">
+                <a:solidFill>
+                  <a:schemeClr val="bg1"/>
+                </a:solidFill>
+                <a:latin typeface="JetBrainsMono NF"/>
+                <a:ea typeface="JetBrainsMono NF"/>
+                <a:cs typeface="JetBrainsMono NF"/>
+              </a:rPr>
+              <a:t>[</a:t>
             </a:r>
             <a:r>
               <a:rPr lang="it-IT" sz="1000" b="0" i="0" u="none" strike="noStrike" cap="none" spc="0">
@@ -28273,7 +29361,7 @@
       </p:sp>
       <p:pic>
         <p:nvPicPr>
-          <p:cNvPr id="1446106676" name="Google Shape;122;p15" descr="image.png"/>
+          <p:cNvPr id="100724177" name="Google Shape;122;p15" descr="image.png"/>
           <p:cNvPicPr/>
           <p:nvPr/>
         </p:nvPicPr>
@@ -28300,7 +29388,7 @@
       </p:pic>
       <p:sp>
         <p:nvSpPr>
-          <p:cNvPr id="1019289534" name="Google Shape;131;p15"/>
+          <p:cNvPr id="871891236" name="Google Shape;131;p15"/>
           <p:cNvSpPr txBox="1"/>
           <p:nvPr/>
         </p:nvSpPr>
@@ -28354,7 +29442,7 @@
       </p:sp>
       <p:pic>
         <p:nvPicPr>
-          <p:cNvPr id="1689516993" name="Google Shape;239;p19" descr="image.png"/>
+          <p:cNvPr id="817568201" name="Google Shape;239;p19" descr="image.png"/>
           <p:cNvPicPr/>
           <p:nvPr/>
         </p:nvPicPr>
@@ -28381,7 +29469,7 @@
       </p:pic>
       <p:sp>
         <p:nvSpPr>
-          <p:cNvPr id="627678141" name=""/>
+          <p:cNvPr id="312089638" name=""/>
           <p:cNvSpPr txBox="1"/>
           <p:nvPr/>
         </p:nvSpPr>
@@ -28756,7 +29844,7 @@
       </p:sp>
       <p:pic>
         <p:nvPicPr>
-          <p:cNvPr id="1299675397" name="Google Shape;122;p15" descr="image.png"/>
+          <p:cNvPr id="1096147124" name="Google Shape;122;p15" descr="image.png"/>
           <p:cNvPicPr/>
           <p:nvPr/>
         </p:nvPicPr>
@@ -28783,7 +29871,7 @@
       </p:pic>
       <p:sp>
         <p:nvSpPr>
-          <p:cNvPr id="29802222" name="Google Shape;131;p15"/>
+          <p:cNvPr id="1833387959" name="Google Shape;131;p15"/>
           <p:cNvSpPr txBox="1"/>
           <p:nvPr/>
         </p:nvSpPr>
@@ -28837,7 +29925,7 @@
       </p:sp>
       <p:pic>
         <p:nvPicPr>
-          <p:cNvPr id="124189412" name="Google Shape;239;p19" descr="image.png"/>
+          <p:cNvPr id="2016388646" name="Google Shape;239;p19" descr="image.png"/>
           <p:cNvPicPr/>
           <p:nvPr/>
         </p:nvPicPr>
@@ -28904,7 +29992,7 @@
       </p:grpSpPr>
       <p:pic>
         <p:nvPicPr>
-          <p:cNvPr id="1557491976" name="Google Shape;176;p17" descr="image.png"/>
+          <p:cNvPr id="490235242" name="Google Shape;176;p17" descr="image.png"/>
           <p:cNvPicPr/>
           <p:nvPr/>
         </p:nvPicPr>
@@ -28931,7 +30019,7 @@
       </p:pic>
       <p:sp>
         <p:nvSpPr>
-          <p:cNvPr id="735402413" name="Google Shape;178;p17"/>
+          <p:cNvPr id="1429540286" name="Google Shape;178;p17"/>
           <p:cNvSpPr txBox="1"/>
           <p:nvPr/>
         </p:nvSpPr>
@@ -28981,7 +30069,7 @@
       </p:sp>
       <p:pic>
         <p:nvPicPr>
-          <p:cNvPr id="1014924873" name="Google Shape;180;p17" descr="image.png"/>
+          <p:cNvPr id="929886810" name="Google Shape;180;p17" descr="image.png"/>
           <p:cNvPicPr/>
           <p:nvPr/>
         </p:nvPicPr>
@@ -29008,7 +30096,7 @@
       </p:pic>
       <p:pic>
         <p:nvPicPr>
-          <p:cNvPr id="212684713" name="Google Shape;198;p17" descr="image.png"/>
+          <p:cNvPr id="874854500" name="Google Shape;198;p17" descr="image.png"/>
           <p:cNvPicPr/>
           <p:nvPr/>
         </p:nvPicPr>
@@ -29035,7 +30123,7 @@
       </p:pic>
       <p:sp>
         <p:nvSpPr>
-          <p:cNvPr id="1654524564" name="Google Shape;178;p17"/>
+          <p:cNvPr id="1693006274" name="Google Shape;178;p17"/>
           <p:cNvSpPr txBox="1"/>
           <p:nvPr/>
         </p:nvSpPr>
@@ -29107,7 +30195,7 @@
       </p:sp>
       <p:pic>
         <p:nvPicPr>
-          <p:cNvPr id="1057416132" name=""/>
+          <p:cNvPr id="1783649702" name=""/>
           <p:cNvPicPr>
             <a:picLocks noChangeAspect="1"/>
           </p:cNvPicPr>
@@ -29169,7 +30257,7 @@
       </p:grpSpPr>
       <p:pic>
         <p:nvPicPr>
-          <p:cNvPr id="1641463984" name="Google Shape;176;p17" descr="image.png"/>
+          <p:cNvPr id="110449433" name="Google Shape;176;p17" descr="image.png"/>
           <p:cNvPicPr/>
           <p:nvPr/>
         </p:nvPicPr>
@@ -29196,7 +30284,7 @@
       </p:pic>
       <p:sp>
         <p:nvSpPr>
-          <p:cNvPr id="15880035" name="Google Shape;178;p17"/>
+          <p:cNvPr id="1158936002" name="Google Shape;178;p17"/>
           <p:cNvSpPr txBox="1"/>
           <p:nvPr/>
         </p:nvSpPr>
@@ -29246,7 +30334,7 @@
       </p:sp>
       <p:pic>
         <p:nvPicPr>
-          <p:cNvPr id="931198440" name="Google Shape;180;p17" descr="image.png"/>
+          <p:cNvPr id="343860436" name="Google Shape;180;p17" descr="image.png"/>
           <p:cNvPicPr/>
           <p:nvPr/>
         </p:nvPicPr>
@@ -29273,7 +30361,7 @@
       </p:pic>
       <p:pic>
         <p:nvPicPr>
-          <p:cNvPr id="124634924" name="Google Shape;199;p17" descr="image.png"/>
+          <p:cNvPr id="2136907501" name="Google Shape;199;p17" descr="image.png"/>
           <p:cNvPicPr/>
           <p:nvPr/>
         </p:nvPicPr>
@@ -29300,7 +30388,7 @@
       </p:pic>
       <p:sp>
         <p:nvSpPr>
-          <p:cNvPr id="337631345" name="Google Shape;178;p17"/>
+          <p:cNvPr id="467898373" name="Google Shape;178;p17"/>
           <p:cNvSpPr txBox="1"/>
           <p:nvPr/>
         </p:nvSpPr>
@@ -29394,7 +30482,7 @@
       </p:sp>
       <p:pic>
         <p:nvPicPr>
-          <p:cNvPr id="953085337" name=""/>
+          <p:cNvPr id="1629893408" name=""/>
           <p:cNvPicPr>
             <a:picLocks noChangeAspect="1"/>
           </p:cNvPicPr>
